--- a/_implementation-notes/evening-series/FotH Evening Session 21 Slides DRAFT v1.pptx
+++ b/_implementation-notes/evening-series/FotH Evening Session 21 Slides DRAFT v1.pptx
@@ -10,6 +10,7 @@
   <p:sldIdLst>
     <p:sldId id="256" r:id="rId2"/>
     <p:sldId id="322" r:id="rId257"/>
+    <p:sldId id="545" r:id="rId20"/>
     <p:sldId id="323" r:id="rId258"/>
     <p:sldId id="502" r:id="rId259"/>
     <p:sldId id="503" r:id="rId260"/>
@@ -17,7 +18,8 @@
     <p:sldId id="505" r:id="rId262"/>
     <p:sldId id="506" r:id="rId263"/>
     <p:sldId id="507" r:id="rId264"/>
-    <p:sldId id="544" r:id="rId265"/>
+    <p:sldId id="546" r:id="rId21"/>
+    <p:sldId id="547" r:id="rId22"/>
     <p:sldId id="508" r:id="rId266"/>
   </p:sldIdLst>
   <p:sldSz cx="12192000" cy="6858000"/>
@@ -748,6 +750,214 @@
 </p:notes>
 </file>
 
+<file path=ppt/notesSlides/notesSlide12.xml><?xml version="1.0" encoding="utf-8"?>
+<p:notes xmlns:a="http://schemas.openxmlformats.org/drawingml/2006/main" xmlns:p="http://schemas.openxmlformats.org/presentationml/2006/main" xmlns:r="http://schemas.openxmlformats.org/officeDocument/2006/relationships">
+  <p:cSld>
+    <p:spTree>
+      <p:nvGrpSpPr>
+        <p:cNvPr id="1" name=""/>
+        <p:cNvGrpSpPr/>
+        <p:nvPr/>
+      </p:nvGrpSpPr>
+      <p:grpSpPr>
+        <a:xfrm>
+          <a:off x="0" y="0"/>
+          <a:ext cx="0" cy="0"/>
+          <a:chOff x="0" y="0"/>
+          <a:chExt cx="0" cy="0"/>
+        </a:xfrm>
+      </p:grpSpPr>
+      <p:sp>
+        <p:nvSpPr>
+          <p:cNvPr id="2" name="Notes Placeholder 1"/>
+          <p:cNvSpPr>
+            <a:spLocks noGrp="1"/>
+          </p:cNvSpPr>
+          <p:nvPr>
+            <p:ph type="body" idx="1"/>
+          </p:nvPr>
+        </p:nvSpPr>
+        <p:spPr/>
+        <p:txBody>
+          <a:bodyPr/>
+          <a:lstStyle/>
+          <a:p>
+            <a:r>
+              <a:t>S21 · WELCOME · LEAD: CONTAINER HOLDER · GROUNDING — every session opens on this map</a:t>
+            </a:r>
+          </a:p>
+          <a:p>
+            <a:r>
+              <a:t>BEATS:</a:t>
+            </a:r>
+          </a:p>
+          <a:p>
+            <a:r>
+              <a:t>1. Locate tonight on the map, plainly: Session 21 carries the whole map into the sending — all four Connects, integrated. Each connection makes the next one real (Matt. 22:37–40).</a:t>
+            </a:r>
+          </a:p>
+          <a:p>
+            <a:r>
+              <a:t>2. The four boxes are one journey — each connection makes the next one real — rooted in the two great commandments: love God, love neighbor (Matt 22:37–40).</a:t>
+            </a:r>
+          </a:p>
+          <a:p>
+            <a:r>
+              <a:t>3. This is also the 'where we are on the map' minute the welcome owes any newcomer.</a:t>
+            </a:r>
+          </a:p>
+          <a:p>
+            <a:r>
+              <a:t>CUES: Two minutes at most; then tonight's road.</a:t>
+            </a:r>
+          </a:p>
+        </p:txBody>
+      </p:sp>
+    </p:spTree>
+  </p:cSld>
+  <p:clrMapOvr>
+    <a:masterClrMapping/>
+  </p:clrMapOvr>
+</p:notes>
+</file>
+
+<file path=ppt/notesSlides/notesSlide13.xml><?xml version="1.0" encoding="utf-8"?>
+<p:notes xmlns:a="http://schemas.openxmlformats.org/drawingml/2006/main" xmlns:p="http://schemas.openxmlformats.org/presentationml/2006/main" xmlns:r="http://schemas.openxmlformats.org/officeDocument/2006/relationships">
+  <p:cSld>
+    <p:spTree>
+      <p:nvGrpSpPr>
+        <p:cNvPr id="1" name=""/>
+        <p:cNvGrpSpPr/>
+        <p:nvPr/>
+      </p:nvGrpSpPr>
+      <p:grpSpPr>
+        <a:xfrm>
+          <a:off x="0" y="0"/>
+          <a:ext cx="0" cy="0"/>
+          <a:chOff x="0" y="0"/>
+          <a:chExt cx="0" cy="0"/>
+        </a:xfrm>
+      </p:grpSpPr>
+      <p:sp>
+        <p:nvSpPr>
+          <p:cNvPr id="2" name="Notes Placeholder 1"/>
+          <p:cNvSpPr>
+            <a:spLocks noGrp="1"/>
+          </p:cNvSpPr>
+          <p:nvPr>
+            <p:ph type="body" idx="1"/>
+          </p:nvPr>
+        </p:nvSpPr>
+        <p:spPr/>
+        <p:txBody>
+          <a:bodyPr/>
+          <a:lstStyle/>
+          <a:p>
+            <a:r>
+              <a:t>S21 · COMMISSIONING · LEAD: CONTENT PRESENTER</a:t>
+            </a:r>
+          </a:p>
+          <a:p>
+            <a:r>
+              <a:t>BEATS:</a:t>
+            </a:r>
+          </a:p>
+          <a:p>
+            <a:r>
+              <a:t>1. The sheet on the screen is the sheet in their hands — walk it, don't read it.</a:t>
+            </a:r>
+          </a:p>
+          <a:p>
+            <a:r>
+              <a:t>2. The standing rhythm first: the morning question, the evening journal line — one box per day on the week-grids.</a:t>
+            </a:r>
+          </a:p>
+          <a:p>
+            <a:r>
+              <a:t>3. A missed box is never a failure — it is an invitation to return.</a:t>
+            </a:r>
+          </a:p>
+          <a:p>
+            <a:r>
+              <a:t>CUES: The four parts are the next slide.</a:t>
+            </a:r>
+          </a:p>
+        </p:txBody>
+      </p:sp>
+    </p:spTree>
+  </p:cSld>
+  <p:clrMapOvr>
+    <a:masterClrMapping/>
+  </p:clrMapOvr>
+</p:notes>
+</file>
+
+<file path=ppt/notesSlides/notesSlide14.xml><?xml version="1.0" encoding="utf-8"?>
+<p:notes xmlns:a="http://schemas.openxmlformats.org/drawingml/2006/main" xmlns:p="http://schemas.openxmlformats.org/presentationml/2006/main" xmlns:r="http://schemas.openxmlformats.org/officeDocument/2006/relationships">
+  <p:cSld>
+    <p:spTree>
+      <p:nvGrpSpPr>
+        <p:cNvPr id="1" name=""/>
+        <p:cNvGrpSpPr/>
+        <p:nvPr/>
+      </p:nvGrpSpPr>
+      <p:grpSpPr>
+        <a:xfrm>
+          <a:off x="0" y="0"/>
+          <a:ext cx="0" cy="0"/>
+          <a:chOff x="0" y="0"/>
+          <a:chExt cx="0" cy="0"/>
+        </a:xfrm>
+      </p:grpSpPr>
+      <p:sp>
+        <p:nvSpPr>
+          <p:cNvPr id="2" name="Notes Placeholder 1"/>
+          <p:cNvSpPr>
+            <a:spLocks noGrp="1"/>
+          </p:cNvSpPr>
+          <p:nvPr>
+            <p:ph type="body" idx="1"/>
+          </p:nvPr>
+        </p:nvSpPr>
+        <p:spPr/>
+        <p:txBody>
+          <a:bodyPr/>
+          <a:lstStyle/>
+          <a:p>
+            <a:r>
+              <a:t>S21 · COMMISSIONING · LEAD: CONTENT PRESENTER</a:t>
+            </a:r>
+          </a:p>
+          <a:p>
+            <a:r>
+              <a:t>BEATS:</a:t>
+            </a:r>
+          </a:p>
+          <a:p>
+            <a:r>
+              <a:t>1. The four parts, in order: the homework practice, week one; the end-of-week-one check-in; the homework practice, week two; one sentence of preparation.</a:t>
+            </a:r>
+          </a:p>
+          <a:p>
+            <a:r>
+              <a:t>2. Check-in partners are named aloud before leaving this slide — the sheet has the line to write the name.</a:t>
+            </a:r>
+          </a:p>
+          <a:p>
+            <a:r>
+              <a:t>GUARD: The sheet-walk, not a re-teach.</a:t>
+            </a:r>
+          </a:p>
+        </p:txBody>
+      </p:sp>
+    </p:spTree>
+  </p:cSld>
+  <p:clrMapOvr>
+    <a:masterClrMapping/>
+  </p:clrMapOvr>
+</p:notes>
+</file>
+
 <file path=ppt/notesSlides/notesSlide254.xml><?xml version="1.0" encoding="utf-8"?>
 <p:notes xmlns:a="http://schemas.openxmlformats.org/drawingml/2006/main" xmlns:r="http://schemas.openxmlformats.org/officeDocument/2006/relationships" xmlns:p="http://schemas.openxmlformats.org/presentationml/2006/main">
   <p:cSld>
@@ -911,38 +1121,37 @@
           <a:lstStyle/>
           <a:p>
             <a:r>
-              <a:rPr lang="en-US" sz="1200"/>
               <a:t>S21 · 7:00–7:08 · LEAD: CONTAINER HOLDER CIRCLE</a:t>
             </a:r>
           </a:p>
           <a:p>
             <a:r>
-              <a:rPr lang="en-US" sz="1200"/>
               <a:t>BEATS:</a:t>
             </a:r>
           </a:p>
           <a:p>
             <a:r>
-              <a:rPr lang="en-US" sz="1200"/>
               <a:t>1. Welcome the new alongside the old — 'find a seat with your family' — and speak the Aaronic blessing over the room first, as every week.</a:t>
             </a:r>
           </a:p>
           <a:p>
             <a:r>
-              <a:rPr lang="en-US" sz="1200"/>
               <a:t>2. Walk the year in one paragraph: the four Connects — Self, Others, God, Mission — a sequence and a way of life, done piece by piece across twenty evenings.</a:t>
             </a:r>
           </a:p>
           <a:p>
             <a:r>
-              <a:rPr lang="en-US" sz="1200"/>
               <a:t>3. Name today's specific act: each parent-and-teen pair stands center; each speaks a specific witnessed blessing over the other; the community seals each family with the Aaronic blessing.</a:t>
             </a:r>
           </a:p>
           <a:p>
             <a:r>
-              <a:rPr lang="en-US" sz="1200"/>
               <a:t>4. To the visitors: you may not have words for what was done here — that is fine; your presence is the gift; today you bear witness.</a:t>
+            </a:r>
+          </a:p>
+          <a:p>
+            <a:r>
+              <a:t>PAIR LEAD: name the leading pair in the welcome — two leaders hold tonight, and the room will see the evening handed back and forth between them; that is the design. The pair practices the session together beforehand.</a:t>
             </a:r>
           </a:p>
         </p:txBody>
@@ -1322,77 +1531,6 @@
             <a:r>
               <a:rPr lang="en-US" sz="1200"/>
               <a:t>2. Today is a sending, not a recruiting pitch — some families will continue, some will not, and both are good. Say it plainly and leave it there.</a:t>
-            </a:r>
-          </a:p>
-        </p:txBody>
-      </p:sp>
-    </p:spTree>
-  </p:cSld>
-  <p:clrMapOvr>
-    <a:masterClrMapping/>
-  </p:clrMapOvr>
-</p:notes>
-</file>
-
-<file path=ppt/notesSlides/notesSlide262.xml><?xml version="1.0" encoding="utf-8"?>
-<p:notes xmlns:a="http://schemas.openxmlformats.org/drawingml/2006/main" xmlns:r="http://schemas.openxmlformats.org/officeDocument/2006/relationships" xmlns:p="http://schemas.openxmlformats.org/presentationml/2006/main">
-  <p:cSld>
-    <p:spTree>
-      <p:nvGrpSpPr>
-        <p:cNvPr id="1" name=""/>
-        <p:cNvGrpSpPr/>
-        <p:nvPr/>
-      </p:nvGrpSpPr>
-      <p:grpSpPr>
-        <a:xfrm>
-          <a:off x="0" y="0"/>
-          <a:ext cx="0" cy="0"/>
-          <a:chOff x="0" y="0"/>
-          <a:chExt cx="0" cy="0"/>
-        </a:xfrm>
-      </p:grpSpPr>
-      <p:sp>
-        <p:nvSpPr>
-          <p:cNvPr id="2" name="Notes Placeholder 1"/>
-          <p:cNvSpPr>
-            <a:spLocks noGrp="1"/>
-          </p:cNvSpPr>
-          <p:nvPr>
-            <p:ph type="body" idx="1"/>
-          </p:nvPr>
-        </p:nvSpPr>
-        <p:spPr/>
-        <p:txBody>
-          <a:bodyPr/>
-          <a:lstStyle/>
-          <a:p>
-            <a:r>
-              <a:rPr lang="en-US" sz="1200"/>
-              <a:t>S21 · 8:13–8:19 · LEAD: CONTENT PRESENTER CIRCLE</a:t>
-            </a:r>
-          </a:p>
-          <a:p>
-            <a:r>
-              <a:rPr lang="en-US" sz="1200"/>
-              <a:t>BEATS:</a:t>
-            </a:r>
-          </a:p>
-          <a:p>
-            <a:r>
-              <a:rPr lang="en-US" sz="1200"/>
-              <a:t>1. Check-off card H21.6: the morning question (5 min) and the session journal note (1–2 min), daily through the interlude.</a:t>
-            </a:r>
-          </a:p>
-          <a:p>
-            <a:r>
-              <a:rPr lang="en-US" sz="1200"/>
-              <a:t>2. One-time boxes: the weekly person who knows what you are working on; the monthly clearing time; the survey if not already back.</a:t>
-            </a:r>
-          </a:p>
-          <a:p>
-            <a:r>
-              <a:rPr lang="en-US" sz="1200"/>
-              <a:t>3. A missed box is never a failure; it is an invitation to return — streaks are not the point, returning is.</a:t>
             </a:r>
           </a:p>
         </p:txBody>
@@ -4681,7 +4819,929 @@
 </p:sld>
 </file>
 
-<file path=ppt/slides/slide256.xml><?xml version="1.0" encoding="utf-8"?>
+<file path=ppt/slides/slide11.xml><?xml version="1.0" encoding="utf-8"?>
+<p:sld xmlns:a="http://schemas.openxmlformats.org/drawingml/2006/main" xmlns:r="http://schemas.openxmlformats.org/officeDocument/2006/relationships" xmlns:p="http://schemas.openxmlformats.org/presentationml/2006/main">
+  <p:cSld>
+    <p:spTree>
+      <p:nvGrpSpPr>
+        <p:cNvPr id="1" name=""/>
+        <p:cNvGrpSpPr/>
+        <p:nvPr/>
+      </p:nvGrpSpPr>
+      <p:grpSpPr>
+        <a:xfrm>
+          <a:off x="0" y="0"/>
+          <a:ext cx="0" cy="0"/>
+          <a:chOff x="0" y="0"/>
+          <a:chExt cx="0" cy="0"/>
+        </a:xfrm>
+      </p:grpSpPr>
+      <p:sp>
+        <p:nvSpPr>
+          <p:cNvPr id="2" name="Rectangle 1"/>
+          <p:cNvSpPr/>
+          <p:nvPr/>
+        </p:nvSpPr>
+        <p:spPr>
+          <a:xfrm>
+            <a:off x="0" y="0"/>
+            <a:ext cx="12191695" cy="6858000"/>
+          </a:xfrm>
+          <a:prstGeom prst="rect">
+            <a:avLst/>
+          </a:prstGeom>
+          <a:solidFill>
+            <a:srgbClr val="FFFFFF"/>
+          </a:solidFill>
+          <a:ln>
+            <a:noFill/>
+          </a:ln>
+        </p:spPr>
+        <p:txBody>
+          <a:bodyPr/>
+          <a:lstStyle/>
+          <a:p>
+            <a:endParaRPr/>
+          </a:p>
+        </p:txBody>
+      </p:sp>
+      <p:sp>
+        <p:nvSpPr>
+          <p:cNvPr id="3" name="TextBox 2"/>
+          <p:cNvSpPr txBox="1"/>
+          <p:nvPr/>
+        </p:nvSpPr>
+        <p:spPr>
+          <a:xfrm>
+            <a:off x="822960" y="502920"/>
+            <a:ext cx="10515600" cy="822960"/>
+          </a:xfrm>
+          <a:prstGeom prst="rect">
+            <a:avLst/>
+          </a:prstGeom>
+          <a:noFill/>
+        </p:spPr>
+        <p:txBody>
+          <a:bodyPr wrap="square">
+            <a:spAutoFit/>
+          </a:bodyPr>
+          <a:lstStyle/>
+          <a:p>
+            <a:pPr algn="l">
+              <a:spcAft>
+                <a:spcPts val="600"/>
+              </a:spcAft>
+            </a:pPr>
+            <a:r>
+              <a:rPr sz="2800" b="1" i="0">
+                <a:solidFill>
+                  <a:srgbClr val="2C5F2D"/>
+                </a:solidFill>
+                <a:latin typeface="Cambria"/>
+              </a:rPr>
+              <a:t>The Leader Feedback Round</a:t>
+            </a:r>
+          </a:p>
+        </p:txBody>
+      </p:sp>
+      <p:sp>
+        <p:nvSpPr>
+          <p:cNvPr id="4" name="TextBox 4"/>
+          <p:cNvSpPr txBox="1"/>
+          <p:nvPr/>
+        </p:nvSpPr>
+        <p:spPr>
+          <a:xfrm>
+            <a:off x="822960" y="1554480"/>
+            <a:ext cx="6675120" cy="4892040"/>
+          </a:xfrm>
+          <a:prstGeom prst="rect">
+            <a:avLst/>
+          </a:prstGeom>
+          <a:noFill/>
+        </p:spPr>
+        <p:txBody>
+          <a:bodyPr wrap="square" lIns="91440" tIns="91440" rIns="91440" bIns="91440"/>
+          <a:lstStyle/>
+          <a:p>
+            <a:pPr marL="274320" indent="-274320">
+              <a:spcAft>
+                <a:spcPts val="900"/>
+              </a:spcAft>
+            </a:pPr>
+            <a:r>
+              <a:rPr sz="2800" b="1" i="0">
+                <a:solidFill>
+                  <a:srgbClr val="97BC62"/>
+                </a:solidFill>
+                <a:latin typeface="Calibri"/>
+              </a:rPr>
+              <a:t>•  </a:t>
+            </a:r>
+            <a:r>
+              <a:rPr sz="2800" b="0" i="0">
+                <a:solidFill>
+                  <a:srgbClr val="222B22"/>
+                </a:solidFill>
+                <a:latin typeface="Calibri"/>
+              </a:rPr>
+              <a:t>Two rounds, same as every session — the container holder first, then the content presenter: three things each</a:t>
+            </a:r>
+          </a:p>
+          <a:p>
+            <a:pPr marL="685800" indent="-274320">
+              <a:spcAft>
+                <a:spcPts val="700"/>
+              </a:spcAft>
+            </a:pPr>
+            <a:r>
+              <a:rPr sz="2000" b="1" i="0">
+                <a:solidFill>
+                  <a:srgbClr val="97BC62"/>
+                </a:solidFill>
+                <a:latin typeface="Calibri"/>
+              </a:rPr>
+              <a:t>–  </a:t>
+            </a:r>
+            <a:r>
+              <a:rPr sz="2000" b="0" i="1">
+                <a:solidFill>
+                  <a:srgbClr val="222B22"/>
+                </a:solidFill>
+                <a:latin typeface="Calibri"/>
+              </a:rPr>
+              <a:t>“What I think went well tonight: ______”</a:t>
+            </a:r>
+          </a:p>
+          <a:p>
+            <a:pPr marL="685800" indent="-274320">
+              <a:spcAft>
+                <a:spcPts val="700"/>
+              </a:spcAft>
+            </a:pPr>
+            <a:r>
+              <a:rPr sz="2000" b="1" i="0">
+                <a:solidFill>
+                  <a:srgbClr val="97BC62"/>
+                </a:solidFill>
+                <a:latin typeface="Calibri"/>
+              </a:rPr>
+              <a:t>–  </a:t>
+            </a:r>
+            <a:r>
+              <a:rPr sz="2000" b="0" i="1">
+                <a:solidFill>
+                  <a:srgbClr val="222B22"/>
+                </a:solidFill>
+                <a:latin typeface="Calibri"/>
+              </a:rPr>
+              <a:t>“What I’d do differently next time: ______”</a:t>
+            </a:r>
+          </a:p>
+          <a:p>
+            <a:pPr marL="685800" indent="-274320">
+              <a:spcAft>
+                <a:spcPts val="700"/>
+              </a:spcAft>
+            </a:pPr>
+            <a:r>
+              <a:rPr sz="2000" b="1" i="0">
+                <a:solidFill>
+                  <a:srgbClr val="97BC62"/>
+                </a:solidFill>
+                <a:latin typeface="Calibri"/>
+              </a:rPr>
+              <a:t>–  </a:t>
+            </a:r>
+            <a:r>
+              <a:rPr sz="2000" b="0" i="1">
+                <a:solidFill>
+                  <a:srgbClr val="222B22"/>
+                </a:solidFill>
+                <a:latin typeface="Calibri"/>
+              </a:rPr>
+              <a:t>“If I were to teach tonight’s process to someone, I would tell them: ______”</a:t>
+            </a:r>
+          </a:p>
+          <a:p>
+            <a:pPr marL="274320" indent="-274320">
+              <a:spcAft>
+                <a:spcPts val="900"/>
+              </a:spcAft>
+            </a:pPr>
+            <a:r>
+              <a:rPr sz="2800" b="1" i="0">
+                <a:solidFill>
+                  <a:srgbClr val="97BC62"/>
+                </a:solidFill>
+                <a:latin typeface="Calibri"/>
+              </a:rPr>
+              <a:t>•  </a:t>
+            </a:r>
+            <a:r>
+              <a:rPr sz="2800" b="0" i="0">
+                <a:solidFill>
+                  <a:srgbClr val="222B22"/>
+                </a:solidFill>
+                <a:latin typeface="Calibri"/>
+              </a:rPr>
+              <a:t>Then the room — the same two questions about tonight</a:t>
+            </a:r>
+          </a:p>
+          <a:p>
+            <a:pPr marL="274320" indent="-274320">
+              <a:spcAft>
+                <a:spcPts val="900"/>
+              </a:spcAft>
+            </a:pPr>
+            <a:r>
+              <a:rPr sz="2800" b="1" i="0">
+                <a:solidFill>
+                  <a:srgbClr val="97BC62"/>
+                </a:solidFill>
+                <a:latin typeface="Calibri"/>
+              </a:rPr>
+              <a:t>•  </a:t>
+            </a:r>
+            <a:r>
+              <a:rPr sz="2800" b="0" i="0">
+                <a:solidFill>
+                  <a:srgbClr val="222B22"/>
+                </a:solidFill>
+                <a:latin typeface="Calibri"/>
+              </a:rPr>
+              <a:t>The leaders receive without defending — “thank you” is the whole response</a:t>
+            </a:r>
+          </a:p>
+        </p:txBody>
+      </p:sp>
+      <p:sp>
+        <p:nvSpPr>
+          <p:cNvPr id="90" name="SlideNum"/>
+          <p:cNvSpPr txBox="1"/>
+          <p:nvPr/>
+        </p:nvSpPr>
+        <p:spPr>
+          <a:xfrm>
+            <a:off x="11384280" y="6446520"/>
+            <a:ext cx="640080" cy="292608"/>
+          </a:xfrm>
+          <a:prstGeom prst="rect">
+            <a:avLst/>
+          </a:prstGeom>
+          <a:noFill/>
+        </p:spPr>
+        <p:txBody>
+          <a:bodyPr wrap="none" lIns="0" tIns="0" rIns="45720" bIns="0" anchor="ctr"/>
+          <a:lstStyle/>
+          <a:p>
+            <a:pPr algn="r"/>
+            <a:r>
+              <a:t>265</a:t>
+            </a:r>
+            <a:endParaRPr sz="1000" b="1">
+              <a:solidFill>
+                <a:srgbClr val="7A8A6E"/>
+              </a:solidFill>
+              <a:latin typeface="Calibri"/>
+            </a:endParaRPr>
+          </a:p>
+        </p:txBody>
+      </p:sp>
+      <p:pic>
+        <p:nvPicPr>
+          <p:cNvPr id="33" name="Picture 33" descr="compass on the trail - the weekly bearing check"/>
+          <p:cNvPicPr>
+            <a:picLocks noChangeAspect="1"/>
+          </p:cNvPicPr>
+          <p:nvPr/>
+        </p:nvPicPr>
+        <p:blipFill>
+          <a:blip r:embed="rId3"/>
+          <a:stretch>
+            <a:fillRect/>
+          </a:stretch>
+        </p:blipFill>
+        <p:spPr>
+          <a:xfrm>
+            <a:off x="8106160" y="1463040"/>
+            <a:ext cx="3259831" cy="4892040"/>
+          </a:xfrm>
+          <a:prstGeom prst="rect">
+            <a:avLst/>
+          </a:prstGeom>
+          <a:ln w="76200">
+            <a:solidFill>
+              <a:srgbClr val="FFFFFF"/>
+            </a:solidFill>
+          </a:ln>
+          <a:effectLst>
+            <a:outerShdw blurRad="63500" dist="25400" dir="5400000" rotWithShape="0">
+              <a:srgbClr val="000000">
+                <a:alpha val="35000"/>
+              </a:srgbClr>
+            </a:outerShdw>
+          </a:effectLst>
+        </p:spPr>
+      </p:pic>
+    </p:spTree>
+  </p:cSld>
+  <p:clrMapOvr>
+    <a:masterClrMapping/>
+  </p:clrMapOvr>
+</p:sld>
+</file>
+
+<file path=ppt/slides/slide12.xml><?xml version="1.0" encoding="utf-8"?>
+<p:sld xmlns:a="http://schemas.openxmlformats.org/drawingml/2006/main" xmlns:p="http://schemas.openxmlformats.org/presentationml/2006/main" xmlns:r="http://schemas.openxmlformats.org/officeDocument/2006/relationships">
+  <p:cSld>
+    <p:spTree>
+      <p:nvGrpSpPr>
+        <p:cNvPr id="1" name=""/>
+        <p:cNvGrpSpPr/>
+        <p:nvPr/>
+      </p:nvGrpSpPr>
+      <p:grpSpPr/>
+      <p:sp>
+        <p:nvSpPr>
+          <p:cNvPr id="2" name="Rectangle 1"/>
+          <p:cNvSpPr/>
+          <p:nvPr/>
+        </p:nvSpPr>
+        <p:spPr>
+          <a:xfrm>
+            <a:off x="0" y="0"/>
+            <a:ext cx="12192000" cy="6858000"/>
+          </a:xfrm>
+          <a:prstGeom prst="rect">
+            <a:avLst/>
+          </a:prstGeom>
+          <a:solidFill>
+            <a:srgbClr val="FFFFFF"/>
+          </a:solidFill>
+          <a:ln>
+            <a:noFill/>
+          </a:ln>
+          <a:effectLst/>
+        </p:spPr>
+        <p:style>
+          <a:lnRef idx="1">
+            <a:schemeClr val="accent1"/>
+          </a:lnRef>
+          <a:fillRef idx="3">
+            <a:schemeClr val="accent1"/>
+          </a:fillRef>
+          <a:effectRef idx="2">
+            <a:schemeClr val="accent1"/>
+          </a:effectRef>
+          <a:fontRef idx="minor">
+            <a:schemeClr val="lt1"/>
+          </a:fontRef>
+        </p:style>
+        <p:txBody>
+          <a:bodyPr rtlCol="0" anchor="ctr"/>
+          <a:lstStyle/>
+          <a:p>
+            <a:pPr algn="ctr"/>
+          </a:p>
+        </p:txBody>
+      </p:sp>
+      <p:sp>
+        <p:nvSpPr>
+          <p:cNvPr id="3" name="TextBox 2"/>
+          <p:cNvSpPr txBox="1"/>
+          <p:nvPr/>
+        </p:nvSpPr>
+        <p:spPr>
+          <a:xfrm>
+            <a:off x="822960" y="502920"/>
+            <a:ext cx="10515600" cy="822960"/>
+          </a:xfrm>
+          <a:prstGeom prst="rect">
+            <a:avLst/>
+          </a:prstGeom>
+          <a:noFill/>
+        </p:spPr>
+        <p:txBody>
+          <a:bodyPr wrap="square">
+            <a:spAutoFit/>
+          </a:bodyPr>
+          <a:lstStyle/>
+          <a:p>
+            <a:r>
+              <a:rPr sz="2800" b="1">
+                <a:solidFill>
+                  <a:srgbClr val="2C5F2D"/>
+                </a:solidFill>
+                <a:latin typeface="Cambria"/>
+              </a:rPr>
+              <a:t>Where We Are — the Four Connects</a:t>
+            </a:r>
+          </a:p>
+        </p:txBody>
+      </p:sp>
+      <p:pic>
+        <p:nvPicPr>
+          <p:cNvPr id="4" name="Picture 3" descr="four-connects.png"/>
+          <p:cNvPicPr>
+            <a:picLocks noChangeAspect="1"/>
+          </p:cNvPicPr>
+          <p:nvPr/>
+        </p:nvPicPr>
+        <p:blipFill>
+          <a:blip r:embed="rId2"/>
+          <a:stretch>
+            <a:fillRect/>
+          </a:stretch>
+        </p:blipFill>
+        <p:spPr>
+          <a:xfrm>
+            <a:off x="932688" y="1645920"/>
+            <a:ext cx="10332720" cy="3708663"/>
+          </a:xfrm>
+          <a:prstGeom prst="rect">
+            <a:avLst/>
+          </a:prstGeom>
+        </p:spPr>
+      </p:pic>
+      <p:sp>
+        <p:nvSpPr>
+          <p:cNvPr id="5" name="TextBox 4"/>
+          <p:cNvSpPr txBox="1"/>
+          <p:nvPr/>
+        </p:nvSpPr>
+        <p:spPr>
+          <a:xfrm>
+            <a:off x="822960" y="5623560"/>
+            <a:ext cx="10515600" cy="914400"/>
+          </a:xfrm>
+          <a:prstGeom prst="rect">
+            <a:avLst/>
+          </a:prstGeom>
+          <a:noFill/>
+        </p:spPr>
+        <p:txBody>
+          <a:bodyPr wrap="square">
+            <a:spAutoFit/>
+          </a:bodyPr>
+          <a:lstStyle/>
+          <a:p>
+            <a:r>
+              <a:rPr sz="1800" b="0">
+                <a:solidFill>
+                  <a:srgbClr val="222B22"/>
+                </a:solidFill>
+                <a:latin typeface="Calibri"/>
+              </a:rPr>
+              <a:t>Session 21 carries the whole map into the sending — </a:t>
+            </a:r>
+            <a:r>
+              <a:rPr sz="1800" b="1">
+                <a:solidFill>
+                  <a:srgbClr val="2C5F2D"/>
+                </a:solidFill>
+                <a:latin typeface="Calibri"/>
+              </a:rPr>
+              <a:t>all four Connects</a:t>
+            </a:r>
+            <a:r>
+              <a:rPr sz="1800" b="0">
+                <a:solidFill>
+                  <a:srgbClr val="222B22"/>
+                </a:solidFill>
+                <a:latin typeface="Calibri"/>
+              </a:rPr>
+              <a:t>, integrated. Each connection makes the next one real (Matt. 22:37–40).</a:t>
+            </a:r>
+          </a:p>
+        </p:txBody>
+      </p:sp>
+      <p:sp>
+        <p:nvSpPr>
+          <p:cNvPr id="90" name="SlideNum"/>
+          <p:cNvSpPr txBox="1"/>
+          <p:nvPr/>
+        </p:nvSpPr>
+        <p:spPr>
+          <a:xfrm>
+            <a:off x="11384280" y="6446520"/>
+            <a:ext cx="640080" cy="292608"/>
+          </a:xfrm>
+          <a:prstGeom prst="rect">
+            <a:avLst/>
+          </a:prstGeom>
+          <a:noFill/>
+        </p:spPr>
+        <p:txBody>
+          <a:bodyPr wrap="none" lIns="0" tIns="0" rIns="45720" bIns="0" anchor="ctr"/>
+          <a:lstStyle/>
+          <a:p>
+            <a:pPr algn="r"/>
+            <a:r>
+              <a:t>256a</a:t>
+            </a:r>
+            <a:endParaRPr sz="1000" b="1">
+              <a:solidFill>
+                <a:srgbClr val="7A8A6E"/>
+              </a:solidFill>
+              <a:latin typeface="Calibri"/>
+            </a:endParaRPr>
+          </a:p>
+        </p:txBody>
+      </p:sp>
+    </p:spTree>
+  </p:cSld>
+  <p:clrMapOvr>
+    <a:masterClrMapping/>
+  </p:clrMapOvr>
+</p:sld>
+</file>
+
+<file path=ppt/slides/slide13.xml><?xml version="1.0" encoding="utf-8"?>
+<p:sld xmlns:a="http://schemas.openxmlformats.org/drawingml/2006/main" xmlns:p="http://schemas.openxmlformats.org/presentationml/2006/main" xmlns:r="http://schemas.openxmlformats.org/officeDocument/2006/relationships">
+  <p:cSld>
+    <p:spTree>
+      <p:nvGrpSpPr>
+        <p:cNvPr id="1" name=""/>
+        <p:cNvGrpSpPr/>
+        <p:nvPr/>
+      </p:nvGrpSpPr>
+      <p:grpSpPr/>
+      <p:sp>
+        <p:nvSpPr>
+          <p:cNvPr id="2" name="Rectangle 1"/>
+          <p:cNvSpPr/>
+          <p:nvPr/>
+        </p:nvSpPr>
+        <p:spPr>
+          <a:xfrm>
+            <a:off x="0" y="0"/>
+            <a:ext cx="12192000" cy="6858000"/>
+          </a:xfrm>
+          <a:prstGeom prst="rect">
+            <a:avLst/>
+          </a:prstGeom>
+          <a:solidFill>
+            <a:srgbClr val="FFFFFF"/>
+          </a:solidFill>
+          <a:ln>
+            <a:noFill/>
+          </a:ln>
+          <a:effectLst/>
+        </p:spPr>
+        <p:style>
+          <a:lnRef idx="1">
+            <a:schemeClr val="accent1"/>
+          </a:lnRef>
+          <a:fillRef idx="3">
+            <a:schemeClr val="accent1"/>
+          </a:fillRef>
+          <a:effectRef idx="2">
+            <a:schemeClr val="accent1"/>
+          </a:effectRef>
+          <a:fontRef idx="minor">
+            <a:schemeClr val="lt1"/>
+          </a:fontRef>
+        </p:style>
+        <p:txBody>
+          <a:bodyPr rtlCol="0" anchor="ctr"/>
+          <a:lstStyle/>
+          <a:p>
+            <a:pPr algn="ctr"/>
+          </a:p>
+        </p:txBody>
+      </p:sp>
+      <p:sp>
+        <p:nvSpPr>
+          <p:cNvPr id="3" name="TextBox 2"/>
+          <p:cNvSpPr txBox="1"/>
+          <p:nvPr/>
+        </p:nvSpPr>
+        <p:spPr>
+          <a:xfrm>
+            <a:off x="822960" y="502920"/>
+            <a:ext cx="10515600" cy="822960"/>
+          </a:xfrm>
+          <a:prstGeom prst="rect">
+            <a:avLst/>
+          </a:prstGeom>
+          <a:noFill/>
+        </p:spPr>
+        <p:txBody>
+          <a:bodyPr wrap="square">
+            <a:spAutoFit/>
+          </a:bodyPr>
+          <a:lstStyle/>
+          <a:p>
+            <a:r>
+              <a:rPr sz="2800" b="1">
+                <a:solidFill>
+                  <a:srgbClr val="2C5F2D"/>
+                </a:solidFill>
+                <a:latin typeface="Cambria"/>
+              </a:rPr>
+              <a:t>The Take-Home Sheet — the Daily Rhythm</a:t>
+            </a:r>
+          </a:p>
+        </p:txBody>
+      </p:sp>
+      <p:pic>
+        <p:nvPicPr>
+          <p:cNvPr id="4" name="Picture 3" descr="s21_part1.png"/>
+          <p:cNvPicPr>
+            <a:picLocks noChangeAspect="1"/>
+          </p:cNvPicPr>
+          <p:nvPr/>
+        </p:nvPicPr>
+        <p:blipFill>
+          <a:blip r:embed="rId2"/>
+          <a:stretch>
+            <a:fillRect/>
+          </a:stretch>
+        </p:blipFill>
+        <p:spPr>
+          <a:xfrm>
+            <a:off x="1798167" y="1463040"/>
+            <a:ext cx="8595360" cy="4039819"/>
+          </a:xfrm>
+          <a:prstGeom prst="rect">
+            <a:avLst/>
+          </a:prstGeom>
+          <a:ln w="12700">
+            <a:solidFill>
+              <a:srgbClr val="C8C8C8"/>
+            </a:solidFill>
+          </a:ln>
+        </p:spPr>
+      </p:pic>
+      <p:sp>
+        <p:nvSpPr>
+          <p:cNvPr id="5" name="TextBox 4"/>
+          <p:cNvSpPr txBox="1"/>
+          <p:nvPr/>
+        </p:nvSpPr>
+        <p:spPr>
+          <a:xfrm>
+            <a:off x="822960" y="6355080"/>
+            <a:ext cx="10515600" cy="411480"/>
+          </a:xfrm>
+          <a:prstGeom prst="rect">
+            <a:avLst/>
+          </a:prstGeom>
+          <a:noFill/>
+        </p:spPr>
+        <p:txBody>
+          <a:bodyPr wrap="square">
+            <a:spAutoFit/>
+          </a:bodyPr>
+          <a:lstStyle/>
+          <a:p>
+            <a:r>
+              <a:rPr sz="1400" i="1">
+                <a:solidFill>
+                  <a:srgbClr val="595959"/>
+                </a:solidFill>
+                <a:latin typeface="Calibri"/>
+              </a:rPr>
+              <a:t>Handed out now — this is the sheet in your hands.</a:t>
+            </a:r>
+          </a:p>
+        </p:txBody>
+      </p:sp>
+      <p:sp>
+        <p:nvSpPr>
+          <p:cNvPr id="90" name="SlideNum"/>
+          <p:cNvSpPr txBox="1"/>
+          <p:nvPr/>
+        </p:nvSpPr>
+        <p:spPr>
+          <a:xfrm>
+            <a:off x="11384280" y="6446520"/>
+            <a:ext cx="640080" cy="292608"/>
+          </a:xfrm>
+          <a:prstGeom prst="rect">
+            <a:avLst/>
+          </a:prstGeom>
+          <a:noFill/>
+        </p:spPr>
+        <p:txBody>
+          <a:bodyPr wrap="none" lIns="0" tIns="0" rIns="45720" bIns="0" anchor="ctr"/>
+          <a:lstStyle/>
+          <a:p>
+            <a:pPr algn="r"/>
+            <a:r>
+              <a:t>264</a:t>
+            </a:r>
+            <a:endParaRPr sz="1000" b="1">
+              <a:solidFill>
+                <a:srgbClr val="7A8A6E"/>
+              </a:solidFill>
+              <a:latin typeface="Calibri"/>
+            </a:endParaRPr>
+          </a:p>
+        </p:txBody>
+      </p:sp>
+    </p:spTree>
+  </p:cSld>
+  <p:clrMapOvr>
+    <a:masterClrMapping/>
+  </p:clrMapOvr>
+</p:sld>
+</file>
+
+<file path=ppt/slides/slide14.xml><?xml version="1.0" encoding="utf-8"?>
+<p:sld xmlns:a="http://schemas.openxmlformats.org/drawingml/2006/main" xmlns:p="http://schemas.openxmlformats.org/presentationml/2006/main" xmlns:r="http://schemas.openxmlformats.org/officeDocument/2006/relationships">
+  <p:cSld>
+    <p:spTree>
+      <p:nvGrpSpPr>
+        <p:cNvPr id="1" name=""/>
+        <p:cNvGrpSpPr/>
+        <p:nvPr/>
+      </p:nvGrpSpPr>
+      <p:grpSpPr/>
+      <p:sp>
+        <p:nvSpPr>
+          <p:cNvPr id="2" name="Rectangle 1"/>
+          <p:cNvSpPr/>
+          <p:nvPr/>
+        </p:nvSpPr>
+        <p:spPr>
+          <a:xfrm>
+            <a:off x="0" y="0"/>
+            <a:ext cx="12192000" cy="6858000"/>
+          </a:xfrm>
+          <a:prstGeom prst="rect">
+            <a:avLst/>
+          </a:prstGeom>
+          <a:solidFill>
+            <a:srgbClr val="FFFFFF"/>
+          </a:solidFill>
+          <a:ln>
+            <a:noFill/>
+          </a:ln>
+          <a:effectLst/>
+        </p:spPr>
+        <p:style>
+          <a:lnRef idx="1">
+            <a:schemeClr val="accent1"/>
+          </a:lnRef>
+          <a:fillRef idx="3">
+            <a:schemeClr val="accent1"/>
+          </a:fillRef>
+          <a:effectRef idx="2">
+            <a:schemeClr val="accent1"/>
+          </a:effectRef>
+          <a:fontRef idx="minor">
+            <a:schemeClr val="lt1"/>
+          </a:fontRef>
+        </p:style>
+        <p:txBody>
+          <a:bodyPr rtlCol="0" anchor="ctr"/>
+          <a:lstStyle/>
+          <a:p>
+            <a:pPr algn="ctr"/>
+          </a:p>
+        </p:txBody>
+      </p:sp>
+      <p:sp>
+        <p:nvSpPr>
+          <p:cNvPr id="3" name="TextBox 2"/>
+          <p:cNvSpPr txBox="1"/>
+          <p:nvPr/>
+        </p:nvSpPr>
+        <p:spPr>
+          <a:xfrm>
+            <a:off x="822960" y="502920"/>
+            <a:ext cx="10515600" cy="822960"/>
+          </a:xfrm>
+          <a:prstGeom prst="rect">
+            <a:avLst/>
+          </a:prstGeom>
+          <a:noFill/>
+        </p:spPr>
+        <p:txBody>
+          <a:bodyPr wrap="square">
+            <a:spAutoFit/>
+          </a:bodyPr>
+          <a:lstStyle/>
+          <a:p>
+            <a:r>
+              <a:rPr sz="2800" b="1">
+                <a:solidFill>
+                  <a:srgbClr val="2C5F2D"/>
+                </a:solidFill>
+                <a:latin typeface="Cambria"/>
+              </a:rPr>
+              <a:t>The Take-Home Sheet — the Four Parts</a:t>
+            </a:r>
+          </a:p>
+        </p:txBody>
+      </p:sp>
+      <p:pic>
+        <p:nvPicPr>
+          <p:cNvPr id="4" name="Picture 3" descr="s21_part2.png"/>
+          <p:cNvPicPr>
+            <a:picLocks noChangeAspect="1"/>
+          </p:cNvPicPr>
+          <p:nvPr/>
+        </p:nvPicPr>
+        <p:blipFill>
+          <a:blip r:embed="rId2"/>
+          <a:stretch>
+            <a:fillRect/>
+          </a:stretch>
+        </p:blipFill>
+        <p:spPr>
+          <a:xfrm>
+            <a:off x="2066004" y="1463040"/>
+            <a:ext cx="8059687" cy="4709160"/>
+          </a:xfrm>
+          <a:prstGeom prst="rect">
+            <a:avLst/>
+          </a:prstGeom>
+          <a:ln w="12700">
+            <a:solidFill>
+              <a:srgbClr val="C8C8C8"/>
+            </a:solidFill>
+          </a:ln>
+        </p:spPr>
+      </p:pic>
+      <p:sp>
+        <p:nvSpPr>
+          <p:cNvPr id="5" name="TextBox 4"/>
+          <p:cNvSpPr txBox="1"/>
+          <p:nvPr/>
+        </p:nvSpPr>
+        <p:spPr>
+          <a:xfrm>
+            <a:off x="822960" y="6355080"/>
+            <a:ext cx="10515600" cy="411480"/>
+          </a:xfrm>
+          <a:prstGeom prst="rect">
+            <a:avLst/>
+          </a:prstGeom>
+          <a:noFill/>
+        </p:spPr>
+        <p:txBody>
+          <a:bodyPr wrap="square">
+            <a:spAutoFit/>
+          </a:bodyPr>
+          <a:lstStyle/>
+          <a:p>
+            <a:r>
+              <a:rPr sz="1400" i="1">
+                <a:solidFill>
+                  <a:srgbClr val="595959"/>
+                </a:solidFill>
+                <a:latin typeface="Calibri"/>
+              </a:rPr>
+              <a:t>One practice at a time — and a partner expecting you at the end of week one.</a:t>
+            </a:r>
+          </a:p>
+        </p:txBody>
+      </p:sp>
+      <p:sp>
+        <p:nvSpPr>
+          <p:cNvPr id="90" name="SlideNum"/>
+          <p:cNvSpPr txBox="1"/>
+          <p:nvPr/>
+        </p:nvSpPr>
+        <p:spPr>
+          <a:xfrm>
+            <a:off x="11384280" y="6446520"/>
+            <a:ext cx="640080" cy="292608"/>
+          </a:xfrm>
+          <a:prstGeom prst="rect">
+            <a:avLst/>
+          </a:prstGeom>
+          <a:noFill/>
+        </p:spPr>
+        <p:txBody>
+          <a:bodyPr wrap="none" lIns="0" tIns="0" rIns="45720" bIns="0" anchor="ctr"/>
+          <a:lstStyle/>
+          <a:p>
+            <a:pPr algn="r"/>
+            <a:r>
+              <a:t>264a</a:t>
+            </a:r>
+            <a:endParaRPr sz="1000" b="1">
+              <a:solidFill>
+                <a:srgbClr val="7A8A6E"/>
+              </a:solidFill>
+              <a:latin typeface="Calibri"/>
+            </a:endParaRPr>
+          </a:p>
+        </p:txBody>
+      </p:sp>
+    </p:spTree>
+  </p:cSld>
+  <p:clrMapOvr>
+    <a:masterClrMapping/>
+  </p:clrMapOvr>
+</p:sld>
+</file>
+
+<file path=ppt/slides/slide2.xml><?xml version="1.0" encoding="utf-8"?>
 <p:sld xmlns:a="http://schemas.openxmlformats.org/drawingml/2006/main" xmlns:r="http://schemas.openxmlformats.org/officeDocument/2006/relationships" xmlns:p="http://schemas.openxmlformats.org/presentationml/2006/main">
   <p:cSld>
     <p:spTree>
@@ -4930,7 +5990,7 @@
 </p:sld>
 </file>
 
-<file path=ppt/slides/slide257.xml><?xml version="1.0" encoding="utf-8"?>
+<file path=ppt/slides/slide3.xml><?xml version="1.0" encoding="utf-8"?>
 <p:sld xmlns:a="http://schemas.openxmlformats.org/drawingml/2006/main" xmlns:r="http://schemas.openxmlformats.org/officeDocument/2006/relationships" xmlns:p="http://schemas.openxmlformats.org/presentationml/2006/main">
   <p:cSld>
     <p:spTree>
@@ -5331,7 +6391,7 @@
 </p:sld>
 </file>
 
-<file path=ppt/slides/slide258.xml><?xml version="1.0" encoding="utf-8"?>
+<file path=ppt/slides/slide4.xml><?xml version="1.0" encoding="utf-8"?>
 <p:sld xmlns:a="http://schemas.openxmlformats.org/drawingml/2006/main" xmlns:r="http://schemas.openxmlformats.org/officeDocument/2006/relationships" xmlns:p="http://schemas.openxmlformats.org/presentationml/2006/main">
   <p:cSld>
     <p:spTree>
@@ -5603,7 +6663,7 @@
 </p:sld>
 </file>
 
-<file path=ppt/slides/slide259.xml><?xml version="1.0" encoding="utf-8"?>
+<file path=ppt/slides/slide5.xml><?xml version="1.0" encoding="utf-8"?>
 <p:sld xmlns:a="http://schemas.openxmlformats.org/drawingml/2006/main" xmlns:r="http://schemas.openxmlformats.org/officeDocument/2006/relationships" xmlns:p="http://schemas.openxmlformats.org/presentationml/2006/main">
   <p:cSld>
     <p:spTree>
@@ -5900,7 +6960,7 @@
 </p:sld>
 </file>
 
-<file path=ppt/slides/slide260.xml><?xml version="1.0" encoding="utf-8"?>
+<file path=ppt/slides/slide6.xml><?xml version="1.0" encoding="utf-8"?>
 <p:sld xmlns:a="http://schemas.openxmlformats.org/drawingml/2006/main" xmlns:r="http://schemas.openxmlformats.org/officeDocument/2006/relationships" xmlns:p="http://schemas.openxmlformats.org/presentationml/2006/main">
   <p:cSld>
     <p:spTree>
@@ -6259,7 +7319,7 @@
 </p:sld>
 </file>
 
-<file path=ppt/slides/slide261.xml><?xml version="1.0" encoding="utf-8"?>
+<file path=ppt/slides/slide7.xml><?xml version="1.0" encoding="utf-8"?>
 <p:sld xmlns:a="http://schemas.openxmlformats.org/drawingml/2006/main" xmlns:r="http://schemas.openxmlformats.org/officeDocument/2006/relationships" xmlns:p="http://schemas.openxmlformats.org/presentationml/2006/main">
   <p:cSld>
     <p:spTree>
@@ -6556,7 +7616,7 @@
 </p:sld>
 </file>
 
-<file path=ppt/slides/slide262.xml><?xml version="1.0" encoding="utf-8"?>
+<file path=ppt/slides/slide8.xml><?xml version="1.0" encoding="utf-8"?>
 <p:sld xmlns:a="http://schemas.openxmlformats.org/drawingml/2006/main" xmlns:r="http://schemas.openxmlformats.org/officeDocument/2006/relationships" xmlns:p="http://schemas.openxmlformats.org/presentationml/2006/main">
   <p:cSld>
     <p:spTree>
@@ -6803,7 +7863,7 @@
 </p:sld>
 </file>
 
-<file path=ppt/slides/slide263.xml><?xml version="1.0" encoding="utf-8"?>
+<file path=ppt/slides/slide9.xml><?xml version="1.0" encoding="utf-8"?>
 <p:sld xmlns:a="http://schemas.openxmlformats.org/drawingml/2006/main" xmlns:r="http://schemas.openxmlformats.org/officeDocument/2006/relationships" xmlns:p="http://schemas.openxmlformats.org/presentationml/2006/main">
   <p:cSld>
     <p:spTree>
@@ -7042,534 +8102,6 @@
           </a:p>
         </p:txBody>
       </p:sp>
-    </p:spTree>
-  </p:cSld>
-  <p:clrMapOvr>
-    <a:masterClrMapping/>
-  </p:clrMapOvr>
-</p:sld>
-</file>
-
-<file path=ppt/slides/slide264.xml><?xml version="1.0" encoding="utf-8"?>
-<p:sld xmlns:a="http://schemas.openxmlformats.org/drawingml/2006/main" xmlns:r="http://schemas.openxmlformats.org/officeDocument/2006/relationships" xmlns:p="http://schemas.openxmlformats.org/presentationml/2006/main">
-  <p:cSld>
-    <p:spTree>
-      <p:nvGrpSpPr>
-        <p:cNvPr id="1" name=""/>
-        <p:cNvGrpSpPr/>
-        <p:nvPr/>
-      </p:nvGrpSpPr>
-      <p:grpSpPr>
-        <a:xfrm>
-          <a:off x="0" y="0"/>
-          <a:ext cx="0" cy="0"/>
-          <a:chOff x="0" y="0"/>
-          <a:chExt cx="0" cy="0"/>
-        </a:xfrm>
-      </p:grpSpPr>
-      <p:sp>
-        <p:nvSpPr>
-          <p:cNvPr id="2" name="Rectangle 1"/>
-          <p:cNvSpPr/>
-          <p:nvPr/>
-        </p:nvSpPr>
-        <p:spPr>
-          <a:xfrm>
-            <a:off x="0" y="0"/>
-            <a:ext cx="12191695" cy="6858000"/>
-          </a:xfrm>
-          <a:prstGeom prst="rect">
-            <a:avLst/>
-          </a:prstGeom>
-          <a:solidFill>
-            <a:srgbClr val="FFFFFF"/>
-          </a:solidFill>
-          <a:ln>
-            <a:noFill/>
-          </a:ln>
-        </p:spPr>
-        <p:txBody>
-          <a:bodyPr/>
-          <a:lstStyle/>
-          <a:p>
-            <a:endParaRPr/>
-          </a:p>
-        </p:txBody>
-      </p:sp>
-      <p:sp>
-        <p:nvSpPr>
-          <p:cNvPr id="3" name="TextBox 2"/>
-          <p:cNvSpPr txBox="1"/>
-          <p:nvPr/>
-        </p:nvSpPr>
-        <p:spPr>
-          <a:xfrm>
-            <a:off x="822960" y="502920"/>
-            <a:ext cx="10515600" cy="822960"/>
-          </a:xfrm>
-          <a:prstGeom prst="rect">
-            <a:avLst/>
-          </a:prstGeom>
-          <a:noFill/>
-        </p:spPr>
-        <p:txBody>
-          <a:bodyPr wrap="square">
-            <a:spAutoFit/>
-          </a:bodyPr>
-          <a:lstStyle/>
-          <a:p>
-            <a:pPr algn="l">
-              <a:spcAft>
-                <a:spcPts val="600"/>
-              </a:spcAft>
-            </a:pPr>
-            <a:r>
-              <a:rPr sz="2800" b="1" i="0">
-                <a:solidFill>
-                  <a:srgbClr val="2C5F2D"/>
-                </a:solidFill>
-                <a:latin typeface="Cambria"/>
-              </a:rPr>
-              <a:t>Your Take-Home Card — This Session’s Practice</a:t>
-            </a:r>
-          </a:p>
-        </p:txBody>
-      </p:sp>
-      <p:sp>
-        <p:nvSpPr>
-          <p:cNvPr id="90" name="SlideNum"/>
-          <p:cNvSpPr txBox="1"/>
-          <p:nvPr/>
-        </p:nvSpPr>
-        <p:spPr>
-          <a:xfrm>
-            <a:off x="11384280" y="6446520"/>
-            <a:ext cx="640080" cy="292608"/>
-          </a:xfrm>
-          <a:prstGeom prst="rect">
-            <a:avLst/>
-          </a:prstGeom>
-          <a:noFill/>
-        </p:spPr>
-        <p:txBody>
-          <a:bodyPr wrap="none" lIns="0" tIns="0" rIns="45720" bIns="0" anchor="ctr"/>
-          <a:lstStyle/>
-          <a:p>
-            <a:pPr algn="r"/>
-            <a:r>
-              <a:t>264</a:t>
-            </a:r>
-            <a:endParaRPr sz="1000" b="1">
-              <a:solidFill>
-                <a:srgbClr val="7A8A6E"/>
-              </a:solidFill>
-              <a:latin typeface="Calibri"/>
-            </a:endParaRPr>
-          </a:p>
-        </p:txBody>
-      </p:sp>
-      <p:pic>
-        <p:nvPicPr>
-          <p:cNvPr id="270" name="CardImage" descr="the Week 21 check-off card, as handed out"/>
-          <p:cNvPicPr>
-            <a:picLocks noChangeAspect="1"/>
-          </p:cNvPicPr>
-          <p:nvPr/>
-        </p:nvPicPr>
-        <p:blipFill>
-          <a:blip r:embed="rId3"/>
-          <a:stretch>
-            <a:fillRect/>
-          </a:stretch>
-        </p:blipFill>
-        <p:spPr>
-          <a:xfrm>
-            <a:off x="1475460" y="1554480"/>
-            <a:ext cx="9240775" cy="4480560"/>
-          </a:xfrm>
-          <a:prstGeom prst="rect">
-            <a:avLst/>
-          </a:prstGeom>
-          <a:ln w="76200">
-            <a:solidFill>
-              <a:srgbClr val="FFFFFF"/>
-            </a:solidFill>
-          </a:ln>
-          <a:effectLst>
-            <a:outerShdw blurRad="63500" dist="25400" dir="5400000" rotWithShape="0">
-              <a:srgbClr val="000000">
-                <a:alpha val="35000"/>
-              </a:srgbClr>
-            </a:outerShdw>
-          </a:effectLst>
-        </p:spPr>
-      </p:pic>
-      <p:sp>
-        <p:nvSpPr>
-          <p:cNvPr id="271" name="Caption"/>
-          <p:cNvSpPr txBox="1"/>
-          <p:nvPr/>
-        </p:nvSpPr>
-        <p:spPr>
-          <a:xfrm>
-            <a:off x="822960" y="6217920"/>
-            <a:ext cx="10515600" cy="457200"/>
-          </a:xfrm>
-          <a:prstGeom prst="rect">
-            <a:avLst/>
-          </a:prstGeom>
-          <a:noFill/>
-        </p:spPr>
-        <p:txBody>
-          <a:bodyPr wrap="square"/>
-          <a:lstStyle/>
-          <a:p>
-            <a:pPr algn="ctr"/>
-            <a:r>
-              <a:rPr sz="1800" b="0" i="1">
-                <a:solidFill>
-                  <a:srgbClr val="222B22"/>
-                </a:solidFill>
-                <a:latin typeface="Calibri"/>
-              </a:rPr>
-              <a:t>Handed out now — fridge, mirror, journal pocket.</a:t>
-            </a:r>
-          </a:p>
-        </p:txBody>
-      </p:sp>
-    </p:spTree>
-  </p:cSld>
-  <p:clrMapOvr>
-    <a:masterClrMapping/>
-  </p:clrMapOvr>
-</p:sld>
-</file>
-
-<file path=ppt/slides/slide265.xml><?xml version="1.0" encoding="utf-8"?>
-<p:sld xmlns:a="http://schemas.openxmlformats.org/drawingml/2006/main" xmlns:r="http://schemas.openxmlformats.org/officeDocument/2006/relationships" xmlns:p="http://schemas.openxmlformats.org/presentationml/2006/main">
-  <p:cSld>
-    <p:spTree>
-      <p:nvGrpSpPr>
-        <p:cNvPr id="1" name=""/>
-        <p:cNvGrpSpPr/>
-        <p:nvPr/>
-      </p:nvGrpSpPr>
-      <p:grpSpPr>
-        <a:xfrm>
-          <a:off x="0" y="0"/>
-          <a:ext cx="0" cy="0"/>
-          <a:chOff x="0" y="0"/>
-          <a:chExt cx="0" cy="0"/>
-        </a:xfrm>
-      </p:grpSpPr>
-      <p:sp>
-        <p:nvSpPr>
-          <p:cNvPr id="2" name="Rectangle 1"/>
-          <p:cNvSpPr/>
-          <p:nvPr/>
-        </p:nvSpPr>
-        <p:spPr>
-          <a:xfrm>
-            <a:off x="0" y="0"/>
-            <a:ext cx="12191695" cy="6858000"/>
-          </a:xfrm>
-          <a:prstGeom prst="rect">
-            <a:avLst/>
-          </a:prstGeom>
-          <a:solidFill>
-            <a:srgbClr val="FFFFFF"/>
-          </a:solidFill>
-          <a:ln>
-            <a:noFill/>
-          </a:ln>
-        </p:spPr>
-        <p:txBody>
-          <a:bodyPr/>
-          <a:lstStyle/>
-          <a:p>
-            <a:endParaRPr/>
-          </a:p>
-        </p:txBody>
-      </p:sp>
-      <p:sp>
-        <p:nvSpPr>
-          <p:cNvPr id="3" name="TextBox 2"/>
-          <p:cNvSpPr txBox="1"/>
-          <p:nvPr/>
-        </p:nvSpPr>
-        <p:spPr>
-          <a:xfrm>
-            <a:off x="822960" y="502920"/>
-            <a:ext cx="10515600" cy="822960"/>
-          </a:xfrm>
-          <a:prstGeom prst="rect">
-            <a:avLst/>
-          </a:prstGeom>
-          <a:noFill/>
-        </p:spPr>
-        <p:txBody>
-          <a:bodyPr wrap="square">
-            <a:spAutoFit/>
-          </a:bodyPr>
-          <a:lstStyle/>
-          <a:p>
-            <a:pPr algn="l">
-              <a:spcAft>
-                <a:spcPts val="600"/>
-              </a:spcAft>
-            </a:pPr>
-            <a:r>
-              <a:rPr sz="2800" b="1" i="0">
-                <a:solidFill>
-                  <a:srgbClr val="2C5F2D"/>
-                </a:solidFill>
-                <a:latin typeface="Cambria"/>
-              </a:rPr>
-              <a:t>The Leader Feedback Round</a:t>
-            </a:r>
-          </a:p>
-        </p:txBody>
-      </p:sp>
-      <p:sp>
-        <p:nvSpPr>
-          <p:cNvPr id="4" name="TextBox 4"/>
-          <p:cNvSpPr txBox="1"/>
-          <p:nvPr/>
-        </p:nvSpPr>
-        <p:spPr>
-          <a:xfrm>
-            <a:off x="822960" y="1554480"/>
-            <a:ext cx="6675120" cy="4892040"/>
-          </a:xfrm>
-          <a:prstGeom prst="rect">
-            <a:avLst/>
-          </a:prstGeom>
-          <a:noFill/>
-        </p:spPr>
-        <p:txBody>
-          <a:bodyPr wrap="square" lIns="91440" tIns="91440" rIns="91440" bIns="91440"/>
-          <a:lstStyle/>
-          <a:p>
-            <a:pPr marL="274320" indent="-274320">
-              <a:spcAft>
-                <a:spcPts val="900"/>
-              </a:spcAft>
-            </a:pPr>
-            <a:r>
-              <a:rPr sz="2800" b="1" i="0">
-                <a:solidFill>
-                  <a:srgbClr val="97BC62"/>
-                </a:solidFill>
-                <a:latin typeface="Calibri"/>
-              </a:rPr>
-              <a:t>•  </a:t>
-            </a:r>
-            <a:r>
-              <a:rPr sz="2800" b="0" i="0">
-                <a:solidFill>
-                  <a:srgbClr val="222B22"/>
-                </a:solidFill>
-                <a:latin typeface="Calibri"/>
-              </a:rPr>
-              <a:t>Two rounds, same as every session — the container holder first, then the content presenter: three things each</a:t>
-            </a:r>
-          </a:p>
-          <a:p>
-            <a:pPr marL="685800" indent="-274320">
-              <a:spcAft>
-                <a:spcPts val="700"/>
-              </a:spcAft>
-            </a:pPr>
-            <a:r>
-              <a:rPr sz="2000" b="1" i="0">
-                <a:solidFill>
-                  <a:srgbClr val="97BC62"/>
-                </a:solidFill>
-                <a:latin typeface="Calibri"/>
-              </a:rPr>
-              <a:t>–  </a:t>
-            </a:r>
-            <a:r>
-              <a:rPr sz="2000" b="0" i="1">
-                <a:solidFill>
-                  <a:srgbClr val="222B22"/>
-                </a:solidFill>
-                <a:latin typeface="Calibri"/>
-              </a:rPr>
-              <a:t>“What I think went well tonight: ______”</a:t>
-            </a:r>
-          </a:p>
-          <a:p>
-            <a:pPr marL="685800" indent="-274320">
-              <a:spcAft>
-                <a:spcPts val="700"/>
-              </a:spcAft>
-            </a:pPr>
-            <a:r>
-              <a:rPr sz="2000" b="1" i="0">
-                <a:solidFill>
-                  <a:srgbClr val="97BC62"/>
-                </a:solidFill>
-                <a:latin typeface="Calibri"/>
-              </a:rPr>
-              <a:t>–  </a:t>
-            </a:r>
-            <a:r>
-              <a:rPr sz="2000" b="0" i="1">
-                <a:solidFill>
-                  <a:srgbClr val="222B22"/>
-                </a:solidFill>
-                <a:latin typeface="Calibri"/>
-              </a:rPr>
-              <a:t>“What I’d do differently next time: ______”</a:t>
-            </a:r>
-          </a:p>
-          <a:p>
-            <a:pPr marL="685800" indent="-274320">
-              <a:spcAft>
-                <a:spcPts val="700"/>
-              </a:spcAft>
-            </a:pPr>
-            <a:r>
-              <a:rPr sz="2000" b="1" i="0">
-                <a:solidFill>
-                  <a:srgbClr val="97BC62"/>
-                </a:solidFill>
-                <a:latin typeface="Calibri"/>
-              </a:rPr>
-              <a:t>–  </a:t>
-            </a:r>
-            <a:r>
-              <a:rPr sz="2000" b="0" i="1">
-                <a:solidFill>
-                  <a:srgbClr val="222B22"/>
-                </a:solidFill>
-                <a:latin typeface="Calibri"/>
-              </a:rPr>
-              <a:t>“If I were to teach tonight’s process to someone, I would tell them: ______”</a:t>
-            </a:r>
-          </a:p>
-          <a:p>
-            <a:pPr marL="274320" indent="-274320">
-              <a:spcAft>
-                <a:spcPts val="900"/>
-              </a:spcAft>
-            </a:pPr>
-            <a:r>
-              <a:rPr sz="2800" b="1" i="0">
-                <a:solidFill>
-                  <a:srgbClr val="97BC62"/>
-                </a:solidFill>
-                <a:latin typeface="Calibri"/>
-              </a:rPr>
-              <a:t>•  </a:t>
-            </a:r>
-            <a:r>
-              <a:rPr sz="2800" b="0" i="0">
-                <a:solidFill>
-                  <a:srgbClr val="222B22"/>
-                </a:solidFill>
-                <a:latin typeface="Calibri"/>
-              </a:rPr>
-              <a:t>Then the room — the same two questions about tonight</a:t>
-            </a:r>
-          </a:p>
-          <a:p>
-            <a:pPr marL="274320" indent="-274320">
-              <a:spcAft>
-                <a:spcPts val="900"/>
-              </a:spcAft>
-            </a:pPr>
-            <a:r>
-              <a:rPr sz="2800" b="1" i="0">
-                <a:solidFill>
-                  <a:srgbClr val="97BC62"/>
-                </a:solidFill>
-                <a:latin typeface="Calibri"/>
-              </a:rPr>
-              <a:t>•  </a:t>
-            </a:r>
-            <a:r>
-              <a:rPr sz="2800" b="0" i="0">
-                <a:solidFill>
-                  <a:srgbClr val="222B22"/>
-                </a:solidFill>
-                <a:latin typeface="Calibri"/>
-              </a:rPr>
-              <a:t>The leaders receive without defending — “thank you” is the whole response</a:t>
-            </a:r>
-          </a:p>
-        </p:txBody>
-      </p:sp>
-      <p:sp>
-        <p:nvSpPr>
-          <p:cNvPr id="90" name="SlideNum"/>
-          <p:cNvSpPr txBox="1"/>
-          <p:nvPr/>
-        </p:nvSpPr>
-        <p:spPr>
-          <a:xfrm>
-            <a:off x="11384280" y="6446520"/>
-            <a:ext cx="640080" cy="292608"/>
-          </a:xfrm>
-          <a:prstGeom prst="rect">
-            <a:avLst/>
-          </a:prstGeom>
-          <a:noFill/>
-        </p:spPr>
-        <p:txBody>
-          <a:bodyPr wrap="none" lIns="0" tIns="0" rIns="45720" bIns="0" anchor="ctr"/>
-          <a:lstStyle/>
-          <a:p>
-            <a:pPr algn="r"/>
-            <a:r>
-              <a:t>265</a:t>
-            </a:r>
-            <a:endParaRPr sz="1000" b="1">
-              <a:solidFill>
-                <a:srgbClr val="7A8A6E"/>
-              </a:solidFill>
-              <a:latin typeface="Calibri"/>
-            </a:endParaRPr>
-          </a:p>
-        </p:txBody>
-      </p:sp>
-      <p:pic>
-        <p:nvPicPr>
-          <p:cNvPr id="33" name="Picture 33" descr="compass on the trail - the weekly bearing check"/>
-          <p:cNvPicPr>
-            <a:picLocks noChangeAspect="1"/>
-          </p:cNvPicPr>
-          <p:nvPr/>
-        </p:nvPicPr>
-        <p:blipFill>
-          <a:blip r:embed="rId3"/>
-          <a:stretch>
-            <a:fillRect/>
-          </a:stretch>
-        </p:blipFill>
-        <p:spPr>
-          <a:xfrm>
-            <a:off x="8106160" y="1463040"/>
-            <a:ext cx="3259831" cy="4892040"/>
-          </a:xfrm>
-          <a:prstGeom prst="rect">
-            <a:avLst/>
-          </a:prstGeom>
-          <a:ln w="76200">
-            <a:solidFill>
-              <a:srgbClr val="FFFFFF"/>
-            </a:solidFill>
-          </a:ln>
-          <a:effectLst>
-            <a:outerShdw blurRad="63500" dist="25400" dir="5400000" rotWithShape="0">
-              <a:srgbClr val="000000">
-                <a:alpha val="35000"/>
-              </a:srgbClr>
-            </a:outerShdw>
-          </a:effectLst>
-        </p:spPr>
-      </p:pic>
     </p:spTree>
   </p:cSld>
   <p:clrMapOvr>

--- a/_implementation-notes/evening-series/FotH Evening Session 21 Slides DRAFT v1.pptx
+++ b/_implementation-notes/evening-series/FotH Evening Session 21 Slides DRAFT v1.pptx
@@ -4819,7 +4819,638 @@
 </p:sld>
 </file>
 
+<file path=ppt/slides/slide10.xml><?xml version="1.0" encoding="utf-8"?>
+<p:sld xmlns:a="http://schemas.openxmlformats.org/drawingml/2006/main" xmlns:r="http://schemas.openxmlformats.org/officeDocument/2006/relationships" xmlns:p="http://schemas.openxmlformats.org/presentationml/2006/main">
+  <p:cSld>
+    <p:spTree>
+      <p:nvGrpSpPr>
+        <p:cNvPr id="1" name=""/>
+        <p:cNvGrpSpPr/>
+        <p:nvPr/>
+      </p:nvGrpSpPr>
+      <p:grpSpPr>
+        <a:xfrm>
+          <a:off x="0" y="0"/>
+          <a:ext cx="0" cy="0"/>
+          <a:chOff x="0" y="0"/>
+          <a:chExt cx="0" cy="0"/>
+        </a:xfrm>
+      </p:grpSpPr>
+      <p:sp>
+        <p:nvSpPr>
+          <p:cNvPr id="2" name="Rectangle 1"/>
+          <p:cNvSpPr/>
+          <p:nvPr/>
+        </p:nvSpPr>
+        <p:spPr>
+          <a:xfrm>
+            <a:off x="0" y="0"/>
+            <a:ext cx="12191695" cy="6858000"/>
+          </a:xfrm>
+          <a:prstGeom prst="rect">
+            <a:avLst/>
+          </a:prstGeom>
+          <a:solidFill>
+            <a:srgbClr val="FFFFFF"/>
+          </a:solidFill>
+          <a:ln>
+            <a:noFill/>
+          </a:ln>
+        </p:spPr>
+        <p:txBody>
+          <a:bodyPr/>
+          <a:lstStyle/>
+          <a:p>
+            <a:endParaRPr/>
+          </a:p>
+        </p:txBody>
+      </p:sp>
+      <p:sp>
+        <p:nvSpPr>
+          <p:cNvPr id="3" name="TextBox 2"/>
+          <p:cNvSpPr txBox="1"/>
+          <p:nvPr/>
+        </p:nvSpPr>
+        <p:spPr>
+          <a:xfrm>
+            <a:off x="822960" y="502920"/>
+            <a:ext cx="10515600" cy="822960"/>
+          </a:xfrm>
+          <a:prstGeom prst="rect">
+            <a:avLst/>
+          </a:prstGeom>
+          <a:noFill/>
+        </p:spPr>
+        <p:txBody>
+          <a:bodyPr wrap="square">
+            <a:spAutoFit/>
+          </a:bodyPr>
+          <a:lstStyle/>
+          <a:p>
+            <a:pPr algn="l">
+              <a:spcAft>
+                <a:spcPts val="600"/>
+              </a:spcAft>
+            </a:pPr>
+            <a:r>
+              <a:rPr sz="2800" b="1" i="0">
+                <a:solidFill>
+                  <a:srgbClr val="2C5F2D"/>
+                </a:solidFill>
+                <a:latin typeface="Cambria"/>
+              </a:rPr>
+              <a:t>Rhythm Card and Going Deeper Bridge</a:t>
+            </a:r>
+          </a:p>
+        </p:txBody>
+      </p:sp>
+      <p:sp>
+        <p:nvSpPr>
+          <p:cNvPr id="4" name="TextBox 4"/>
+          <p:cNvSpPr txBox="1"/>
+          <p:nvPr/>
+        </p:nvSpPr>
+        <p:spPr>
+          <a:xfrm>
+            <a:off x="822960" y="1554480"/>
+            <a:ext cx="10515600" cy="4892040"/>
+          </a:xfrm>
+          <a:prstGeom prst="rect">
+            <a:avLst/>
+          </a:prstGeom>
+          <a:noFill/>
+        </p:spPr>
+        <p:txBody>
+          <a:bodyPr wrap="square" lIns="91440" tIns="91440" rIns="91440" bIns="91440"/>
+          <a:lstStyle/>
+          <a:p>
+            <a:pPr marL="342900" indent="-342900">
+              <a:spcAft>
+                <a:spcPts val="900"/>
+              </a:spcAft>
+            </a:pPr>
+            <a:r>
+              <a:rPr sz="2400" b="1" i="0">
+                <a:solidFill>
+                  <a:srgbClr val="97BC62"/>
+                </a:solidFill>
+                <a:latin typeface="Calibri"/>
+              </a:rPr>
+              <a:t>1   </a:t>
+            </a:r>
+            <a:r>
+              <a:rPr sz="2400" b="0" i="0">
+                <a:solidFill>
+                  <a:srgbClr val="222B22"/>
+                </a:solidFill>
+                <a:latin typeface="Calibri"/>
+              </a:rPr>
+              <a:t>The Daily / Weekly / Monthly Rhythm Card — daily: the morning question and an evening journal note; weekly: one person who knows what you are working on; monthly: a clearing time. It is your card, in your handwriting.</a:t>
+            </a:r>
+          </a:p>
+          <a:p>
+            <a:pPr marL="342900" indent="-342900">
+              <a:spcAft>
+                <a:spcPts val="900"/>
+              </a:spcAft>
+            </a:pPr>
+            <a:r>
+              <a:rPr sz="2400" b="1" i="0">
+                <a:solidFill>
+                  <a:srgbClr val="97BC62"/>
+                </a:solidFill>
+                <a:latin typeface="Calibri"/>
+              </a:rPr>
+              <a:t>2   </a:t>
+            </a:r>
+            <a:r>
+              <a:rPr sz="2400" b="0" i="0">
+                <a:solidFill>
+                  <a:srgbClr val="222B22"/>
+                </a:solidFill>
+                <a:latin typeface="Calibri"/>
+              </a:rPr>
+              <a:t>The Going Deeper bridge — twelve Wednesdays. Decide on your own time. Tonight is not a recruiting pitch.</a:t>
+            </a:r>
+          </a:p>
+          <a:p>
+            <a:pPr marL="342900" indent="-342900">
+              <a:spcAft>
+                <a:spcPts val="900"/>
+              </a:spcAft>
+            </a:pPr>
+            <a:r>
+              <a:rPr sz="2400" b="1" i="0">
+                <a:solidFill>
+                  <a:srgbClr val="97BC62"/>
+                </a:solidFill>
+                <a:latin typeface="Calibri"/>
+              </a:rPr>
+              <a:t>3   </a:t>
+            </a:r>
+            <a:r>
+              <a:rPr sz="2400" b="0" i="0">
+                <a:solidFill>
+                  <a:srgbClr val="222B22"/>
+                </a:solidFill>
+                <a:latin typeface="Calibri"/>
+              </a:rPr>
+              <a:t>The Post-Series Survey — the bin at the door tonight, or email it this week. The next group of families benefits from your honesty.</a:t>
+            </a:r>
+          </a:p>
+          <a:p>
+            <a:pPr marL="274320" indent="-274320">
+              <a:spcAft>
+                <a:spcPts val="900"/>
+              </a:spcAft>
+            </a:pPr>
+            <a:r>
+              <a:rPr sz="2400" b="1" i="0">
+                <a:solidFill>
+                  <a:srgbClr val="97BC62"/>
+                </a:solidFill>
+                <a:latin typeface="Calibri"/>
+              </a:rPr>
+              <a:t>•  </a:t>
+            </a:r>
+            <a:r>
+              <a:rPr sz="2400" b="0" i="0">
+                <a:solidFill>
+                  <a:srgbClr val="222B22"/>
+                </a:solidFill>
+                <a:latin typeface="Calibri"/>
+              </a:rPr>
+              <a:t>If a daily practice slips — do not start over from scratch; start the next day. Streaks are not the point. Returning is the point.</a:t>
+            </a:r>
+          </a:p>
+        </p:txBody>
+      </p:sp>
+      <p:sp>
+        <p:nvSpPr>
+          <p:cNvPr id="90" name="SlideNum"/>
+          <p:cNvSpPr txBox="1"/>
+          <p:nvPr/>
+        </p:nvSpPr>
+        <p:spPr>
+          <a:xfrm>
+            <a:off x="11384280" y="6446520"/>
+            <a:ext cx="640080" cy="292608"/>
+          </a:xfrm>
+          <a:prstGeom prst="rect">
+            <a:avLst/>
+          </a:prstGeom>
+          <a:noFill/>
+        </p:spPr>
+        <p:txBody>
+          <a:bodyPr wrap="none" lIns="0" tIns="0" rIns="45720" bIns="0" anchor="ctr"/>
+          <a:lstStyle/>
+          <a:p>
+            <a:pPr algn="r"/>
+            <a:r>
+              <a:t>263</a:t>
+            </a:r>
+            <a:endParaRPr sz="1000" b="1">
+              <a:solidFill>
+                <a:srgbClr val="7A8A6E"/>
+              </a:solidFill>
+              <a:latin typeface="Calibri"/>
+            </a:endParaRPr>
+          </a:p>
+        </p:txBody>
+      </p:sp>
+    </p:spTree>
+  </p:cSld>
+  <p:clrMapOvr>
+    <a:masterClrMapping/>
+  </p:clrMapOvr>
+</p:sld>
+</file>
+
 <file path=ppt/slides/slide11.xml><?xml version="1.0" encoding="utf-8"?>
+<p:sld xmlns:a="http://schemas.openxmlformats.org/drawingml/2006/main" xmlns:p="http://schemas.openxmlformats.org/presentationml/2006/main" xmlns:r="http://schemas.openxmlformats.org/officeDocument/2006/relationships">
+  <p:cSld>
+    <p:spTree>
+      <p:nvGrpSpPr>
+        <p:cNvPr id="1" name=""/>
+        <p:cNvGrpSpPr/>
+        <p:nvPr/>
+      </p:nvGrpSpPr>
+      <p:grpSpPr/>
+      <p:sp>
+        <p:nvSpPr>
+          <p:cNvPr id="2" name="Rectangle 1"/>
+          <p:cNvSpPr/>
+          <p:nvPr/>
+        </p:nvSpPr>
+        <p:spPr>
+          <a:xfrm>
+            <a:off x="0" y="0"/>
+            <a:ext cx="12192000" cy="6858000"/>
+          </a:xfrm>
+          <a:prstGeom prst="rect">
+            <a:avLst/>
+          </a:prstGeom>
+          <a:solidFill>
+            <a:srgbClr val="FFFFFF"/>
+          </a:solidFill>
+          <a:ln>
+            <a:noFill/>
+          </a:ln>
+          <a:effectLst/>
+        </p:spPr>
+        <p:style>
+          <a:lnRef idx="1">
+            <a:schemeClr val="accent1"/>
+          </a:lnRef>
+          <a:fillRef idx="3">
+            <a:schemeClr val="accent1"/>
+          </a:fillRef>
+          <a:effectRef idx="2">
+            <a:schemeClr val="accent1"/>
+          </a:effectRef>
+          <a:fontRef idx="minor">
+            <a:schemeClr val="lt1"/>
+          </a:fontRef>
+        </p:style>
+        <p:txBody>
+          <a:bodyPr rtlCol="0" anchor="ctr"/>
+          <a:lstStyle/>
+          <a:p>
+            <a:pPr algn="ctr"/>
+          </a:p>
+        </p:txBody>
+      </p:sp>
+      <p:sp>
+        <p:nvSpPr>
+          <p:cNvPr id="3" name="TextBox 2"/>
+          <p:cNvSpPr txBox="1"/>
+          <p:nvPr/>
+        </p:nvSpPr>
+        <p:spPr>
+          <a:xfrm>
+            <a:off x="822960" y="502920"/>
+            <a:ext cx="10515600" cy="822960"/>
+          </a:xfrm>
+          <a:prstGeom prst="rect">
+            <a:avLst/>
+          </a:prstGeom>
+          <a:noFill/>
+        </p:spPr>
+        <p:txBody>
+          <a:bodyPr wrap="square">
+            <a:spAutoFit/>
+          </a:bodyPr>
+          <a:lstStyle/>
+          <a:p>
+            <a:r>
+              <a:rPr sz="2800" b="1">
+                <a:solidFill>
+                  <a:srgbClr val="2C5F2D"/>
+                </a:solidFill>
+                <a:latin typeface="Cambria"/>
+              </a:rPr>
+              <a:t>The Take-Home Sheet — the Daily Rhythm</a:t>
+            </a:r>
+          </a:p>
+        </p:txBody>
+      </p:sp>
+      <p:pic>
+        <p:nvPicPr>
+          <p:cNvPr id="4" name="Picture 3" descr="s21_part1.png"/>
+          <p:cNvPicPr>
+            <a:picLocks noChangeAspect="1"/>
+          </p:cNvPicPr>
+          <p:nvPr/>
+        </p:nvPicPr>
+        <p:blipFill>
+          <a:blip r:embed="rId2"/>
+          <a:stretch>
+            <a:fillRect/>
+          </a:stretch>
+        </p:blipFill>
+        <p:spPr>
+          <a:xfrm>
+            <a:off x="1798167" y="1463040"/>
+            <a:ext cx="8595360" cy="4039819"/>
+          </a:xfrm>
+          <a:prstGeom prst="rect">
+            <a:avLst/>
+          </a:prstGeom>
+          <a:ln w="12700">
+            <a:solidFill>
+              <a:srgbClr val="C8C8C8"/>
+            </a:solidFill>
+          </a:ln>
+        </p:spPr>
+      </p:pic>
+      <p:sp>
+        <p:nvSpPr>
+          <p:cNvPr id="5" name="TextBox 4"/>
+          <p:cNvSpPr txBox="1"/>
+          <p:nvPr/>
+        </p:nvSpPr>
+        <p:spPr>
+          <a:xfrm>
+            <a:off x="822960" y="6355080"/>
+            <a:ext cx="10515600" cy="411480"/>
+          </a:xfrm>
+          <a:prstGeom prst="rect">
+            <a:avLst/>
+          </a:prstGeom>
+          <a:noFill/>
+        </p:spPr>
+        <p:txBody>
+          <a:bodyPr wrap="square">
+            <a:spAutoFit/>
+          </a:bodyPr>
+          <a:lstStyle/>
+          <a:p>
+            <a:r>
+              <a:rPr sz="1400" i="1">
+                <a:solidFill>
+                  <a:srgbClr val="595959"/>
+                </a:solidFill>
+                <a:latin typeface="Calibri"/>
+              </a:rPr>
+              <a:t>Handed out now — this is the sheet in your hands.</a:t>
+            </a:r>
+          </a:p>
+        </p:txBody>
+      </p:sp>
+      <p:sp>
+        <p:nvSpPr>
+          <p:cNvPr id="90" name="SlideNum"/>
+          <p:cNvSpPr txBox="1"/>
+          <p:nvPr/>
+        </p:nvSpPr>
+        <p:spPr>
+          <a:xfrm>
+            <a:off x="11384280" y="6446520"/>
+            <a:ext cx="640080" cy="292608"/>
+          </a:xfrm>
+          <a:prstGeom prst="rect">
+            <a:avLst/>
+          </a:prstGeom>
+          <a:noFill/>
+        </p:spPr>
+        <p:txBody>
+          <a:bodyPr wrap="none" lIns="0" tIns="0" rIns="45720" bIns="0" anchor="ctr"/>
+          <a:lstStyle/>
+          <a:p>
+            <a:pPr algn="r"/>
+            <a:r>
+              <a:t>264</a:t>
+            </a:r>
+            <a:endParaRPr sz="1000" b="1">
+              <a:solidFill>
+                <a:srgbClr val="7A8A6E"/>
+              </a:solidFill>
+              <a:latin typeface="Calibri"/>
+            </a:endParaRPr>
+          </a:p>
+        </p:txBody>
+      </p:sp>
+    </p:spTree>
+  </p:cSld>
+  <p:clrMapOvr>
+    <a:masterClrMapping/>
+  </p:clrMapOvr>
+</p:sld>
+</file>
+
+<file path=ppt/slides/slide12.xml><?xml version="1.0" encoding="utf-8"?>
+<p:sld xmlns:a="http://schemas.openxmlformats.org/drawingml/2006/main" xmlns:p="http://schemas.openxmlformats.org/presentationml/2006/main" xmlns:r="http://schemas.openxmlformats.org/officeDocument/2006/relationships">
+  <p:cSld>
+    <p:spTree>
+      <p:nvGrpSpPr>
+        <p:cNvPr id="1" name=""/>
+        <p:cNvGrpSpPr/>
+        <p:nvPr/>
+      </p:nvGrpSpPr>
+      <p:grpSpPr/>
+      <p:sp>
+        <p:nvSpPr>
+          <p:cNvPr id="2" name="Rectangle 1"/>
+          <p:cNvSpPr/>
+          <p:nvPr/>
+        </p:nvSpPr>
+        <p:spPr>
+          <a:xfrm>
+            <a:off x="0" y="0"/>
+            <a:ext cx="12192000" cy="6858000"/>
+          </a:xfrm>
+          <a:prstGeom prst="rect">
+            <a:avLst/>
+          </a:prstGeom>
+          <a:solidFill>
+            <a:srgbClr val="FFFFFF"/>
+          </a:solidFill>
+          <a:ln>
+            <a:noFill/>
+          </a:ln>
+          <a:effectLst/>
+        </p:spPr>
+        <p:style>
+          <a:lnRef idx="1">
+            <a:schemeClr val="accent1"/>
+          </a:lnRef>
+          <a:fillRef idx="3">
+            <a:schemeClr val="accent1"/>
+          </a:fillRef>
+          <a:effectRef idx="2">
+            <a:schemeClr val="accent1"/>
+          </a:effectRef>
+          <a:fontRef idx="minor">
+            <a:schemeClr val="lt1"/>
+          </a:fontRef>
+        </p:style>
+        <p:txBody>
+          <a:bodyPr rtlCol="0" anchor="ctr"/>
+          <a:lstStyle/>
+          <a:p>
+            <a:pPr algn="ctr"/>
+          </a:p>
+        </p:txBody>
+      </p:sp>
+      <p:sp>
+        <p:nvSpPr>
+          <p:cNvPr id="3" name="TextBox 2"/>
+          <p:cNvSpPr txBox="1"/>
+          <p:nvPr/>
+        </p:nvSpPr>
+        <p:spPr>
+          <a:xfrm>
+            <a:off x="822960" y="502920"/>
+            <a:ext cx="10515600" cy="822960"/>
+          </a:xfrm>
+          <a:prstGeom prst="rect">
+            <a:avLst/>
+          </a:prstGeom>
+          <a:noFill/>
+        </p:spPr>
+        <p:txBody>
+          <a:bodyPr wrap="square">
+            <a:spAutoFit/>
+          </a:bodyPr>
+          <a:lstStyle/>
+          <a:p>
+            <a:r>
+              <a:rPr sz="2800" b="1">
+                <a:solidFill>
+                  <a:srgbClr val="2C5F2D"/>
+                </a:solidFill>
+                <a:latin typeface="Cambria"/>
+              </a:rPr>
+              <a:t>The Take-Home Sheet — the Four Parts</a:t>
+            </a:r>
+          </a:p>
+        </p:txBody>
+      </p:sp>
+      <p:pic>
+        <p:nvPicPr>
+          <p:cNvPr id="4" name="Picture 3" descr="s21_part2.png"/>
+          <p:cNvPicPr>
+            <a:picLocks noChangeAspect="1"/>
+          </p:cNvPicPr>
+          <p:nvPr/>
+        </p:nvPicPr>
+        <p:blipFill>
+          <a:blip r:embed="rId2"/>
+          <a:stretch>
+            <a:fillRect/>
+          </a:stretch>
+        </p:blipFill>
+        <p:spPr>
+          <a:xfrm>
+            <a:off x="2066004" y="1463040"/>
+            <a:ext cx="8059687" cy="4709160"/>
+          </a:xfrm>
+          <a:prstGeom prst="rect">
+            <a:avLst/>
+          </a:prstGeom>
+          <a:ln w="12700">
+            <a:solidFill>
+              <a:srgbClr val="C8C8C8"/>
+            </a:solidFill>
+          </a:ln>
+        </p:spPr>
+      </p:pic>
+      <p:sp>
+        <p:nvSpPr>
+          <p:cNvPr id="5" name="TextBox 4"/>
+          <p:cNvSpPr txBox="1"/>
+          <p:nvPr/>
+        </p:nvSpPr>
+        <p:spPr>
+          <a:xfrm>
+            <a:off x="822960" y="6355080"/>
+            <a:ext cx="10515600" cy="411480"/>
+          </a:xfrm>
+          <a:prstGeom prst="rect">
+            <a:avLst/>
+          </a:prstGeom>
+          <a:noFill/>
+        </p:spPr>
+        <p:txBody>
+          <a:bodyPr wrap="square">
+            <a:spAutoFit/>
+          </a:bodyPr>
+          <a:lstStyle/>
+          <a:p>
+            <a:r>
+              <a:rPr sz="1400" i="1">
+                <a:solidFill>
+                  <a:srgbClr val="595959"/>
+                </a:solidFill>
+                <a:latin typeface="Calibri"/>
+              </a:rPr>
+              <a:t>One practice at a time — and a partner expecting you at the end of week one.</a:t>
+            </a:r>
+          </a:p>
+        </p:txBody>
+      </p:sp>
+      <p:sp>
+        <p:nvSpPr>
+          <p:cNvPr id="90" name="SlideNum"/>
+          <p:cNvSpPr txBox="1"/>
+          <p:nvPr/>
+        </p:nvSpPr>
+        <p:spPr>
+          <a:xfrm>
+            <a:off x="11384280" y="6446520"/>
+            <a:ext cx="640080" cy="292608"/>
+          </a:xfrm>
+          <a:prstGeom prst="rect">
+            <a:avLst/>
+          </a:prstGeom>
+          <a:noFill/>
+        </p:spPr>
+        <p:txBody>
+          <a:bodyPr wrap="none" lIns="0" tIns="0" rIns="45720" bIns="0" anchor="ctr"/>
+          <a:lstStyle/>
+          <a:p>
+            <a:pPr algn="r"/>
+            <a:r>
+              <a:t>264a</a:t>
+            </a:r>
+            <a:endParaRPr sz="1000" b="1">
+              <a:solidFill>
+                <a:srgbClr val="7A8A6E"/>
+              </a:solidFill>
+              <a:latin typeface="Calibri"/>
+            </a:endParaRPr>
+          </a:p>
+        </p:txBody>
+      </p:sp>
+    </p:spTree>
+  </p:cSld>
+  <p:clrMapOvr>
+    <a:masterClrMapping/>
+  </p:clrMapOvr>
+</p:sld>
+</file>
+
+<file path=ppt/slides/slide13.xml><?xml version="1.0" encoding="utf-8"?>
 <p:sld xmlns:a="http://schemas.openxmlformats.org/drawingml/2006/main" xmlns:r="http://schemas.openxmlformats.org/officeDocument/2006/relationships" xmlns:p="http://schemas.openxmlformats.org/presentationml/2006/main">
   <p:cSld>
     <p:spTree>
@@ -5152,595 +5783,6 @@
 </p:sld>
 </file>
 
-<file path=ppt/slides/slide12.xml><?xml version="1.0" encoding="utf-8"?>
-<p:sld xmlns:a="http://schemas.openxmlformats.org/drawingml/2006/main" xmlns:p="http://schemas.openxmlformats.org/presentationml/2006/main" xmlns:r="http://schemas.openxmlformats.org/officeDocument/2006/relationships">
-  <p:cSld>
-    <p:spTree>
-      <p:nvGrpSpPr>
-        <p:cNvPr id="1" name=""/>
-        <p:cNvGrpSpPr/>
-        <p:nvPr/>
-      </p:nvGrpSpPr>
-      <p:grpSpPr/>
-      <p:sp>
-        <p:nvSpPr>
-          <p:cNvPr id="2" name="Rectangle 1"/>
-          <p:cNvSpPr/>
-          <p:nvPr/>
-        </p:nvSpPr>
-        <p:spPr>
-          <a:xfrm>
-            <a:off x="0" y="0"/>
-            <a:ext cx="12192000" cy="6858000"/>
-          </a:xfrm>
-          <a:prstGeom prst="rect">
-            <a:avLst/>
-          </a:prstGeom>
-          <a:solidFill>
-            <a:srgbClr val="FFFFFF"/>
-          </a:solidFill>
-          <a:ln>
-            <a:noFill/>
-          </a:ln>
-          <a:effectLst/>
-        </p:spPr>
-        <p:style>
-          <a:lnRef idx="1">
-            <a:schemeClr val="accent1"/>
-          </a:lnRef>
-          <a:fillRef idx="3">
-            <a:schemeClr val="accent1"/>
-          </a:fillRef>
-          <a:effectRef idx="2">
-            <a:schemeClr val="accent1"/>
-          </a:effectRef>
-          <a:fontRef idx="minor">
-            <a:schemeClr val="lt1"/>
-          </a:fontRef>
-        </p:style>
-        <p:txBody>
-          <a:bodyPr rtlCol="0" anchor="ctr"/>
-          <a:lstStyle/>
-          <a:p>
-            <a:pPr algn="ctr"/>
-          </a:p>
-        </p:txBody>
-      </p:sp>
-      <p:sp>
-        <p:nvSpPr>
-          <p:cNvPr id="3" name="TextBox 2"/>
-          <p:cNvSpPr txBox="1"/>
-          <p:nvPr/>
-        </p:nvSpPr>
-        <p:spPr>
-          <a:xfrm>
-            <a:off x="822960" y="502920"/>
-            <a:ext cx="10515600" cy="822960"/>
-          </a:xfrm>
-          <a:prstGeom prst="rect">
-            <a:avLst/>
-          </a:prstGeom>
-          <a:noFill/>
-        </p:spPr>
-        <p:txBody>
-          <a:bodyPr wrap="square">
-            <a:spAutoFit/>
-          </a:bodyPr>
-          <a:lstStyle/>
-          <a:p>
-            <a:r>
-              <a:rPr sz="2800" b="1">
-                <a:solidFill>
-                  <a:srgbClr val="2C5F2D"/>
-                </a:solidFill>
-                <a:latin typeface="Cambria"/>
-              </a:rPr>
-              <a:t>Where We Are — the Four Connects</a:t>
-            </a:r>
-          </a:p>
-        </p:txBody>
-      </p:sp>
-      <p:pic>
-        <p:nvPicPr>
-          <p:cNvPr id="4" name="Picture 3" descr="four-connects.png"/>
-          <p:cNvPicPr>
-            <a:picLocks noChangeAspect="1"/>
-          </p:cNvPicPr>
-          <p:nvPr/>
-        </p:nvPicPr>
-        <p:blipFill>
-          <a:blip r:embed="rId2"/>
-          <a:stretch>
-            <a:fillRect/>
-          </a:stretch>
-        </p:blipFill>
-        <p:spPr>
-          <a:xfrm>
-            <a:off x="932688" y="1645920"/>
-            <a:ext cx="10332720" cy="3708663"/>
-          </a:xfrm>
-          <a:prstGeom prst="rect">
-            <a:avLst/>
-          </a:prstGeom>
-        </p:spPr>
-      </p:pic>
-      <p:sp>
-        <p:nvSpPr>
-          <p:cNvPr id="5" name="TextBox 4"/>
-          <p:cNvSpPr txBox="1"/>
-          <p:nvPr/>
-        </p:nvSpPr>
-        <p:spPr>
-          <a:xfrm>
-            <a:off x="822960" y="5623560"/>
-            <a:ext cx="10515600" cy="914400"/>
-          </a:xfrm>
-          <a:prstGeom prst="rect">
-            <a:avLst/>
-          </a:prstGeom>
-          <a:noFill/>
-        </p:spPr>
-        <p:txBody>
-          <a:bodyPr wrap="square">
-            <a:spAutoFit/>
-          </a:bodyPr>
-          <a:lstStyle/>
-          <a:p>
-            <a:r>
-              <a:rPr sz="1800" b="0">
-                <a:solidFill>
-                  <a:srgbClr val="222B22"/>
-                </a:solidFill>
-                <a:latin typeface="Calibri"/>
-              </a:rPr>
-              <a:t>Session 21 carries the whole map into the sending — </a:t>
-            </a:r>
-            <a:r>
-              <a:rPr sz="1800" b="1">
-                <a:solidFill>
-                  <a:srgbClr val="2C5F2D"/>
-                </a:solidFill>
-                <a:latin typeface="Calibri"/>
-              </a:rPr>
-              <a:t>all four Connects</a:t>
-            </a:r>
-            <a:r>
-              <a:rPr sz="1800" b="0">
-                <a:solidFill>
-                  <a:srgbClr val="222B22"/>
-                </a:solidFill>
-                <a:latin typeface="Calibri"/>
-              </a:rPr>
-              <a:t>, integrated. Each connection makes the next one real (Matt. 22:37–40).</a:t>
-            </a:r>
-          </a:p>
-        </p:txBody>
-      </p:sp>
-      <p:sp>
-        <p:nvSpPr>
-          <p:cNvPr id="90" name="SlideNum"/>
-          <p:cNvSpPr txBox="1"/>
-          <p:nvPr/>
-        </p:nvSpPr>
-        <p:spPr>
-          <a:xfrm>
-            <a:off x="11384280" y="6446520"/>
-            <a:ext cx="640080" cy="292608"/>
-          </a:xfrm>
-          <a:prstGeom prst="rect">
-            <a:avLst/>
-          </a:prstGeom>
-          <a:noFill/>
-        </p:spPr>
-        <p:txBody>
-          <a:bodyPr wrap="none" lIns="0" tIns="0" rIns="45720" bIns="0" anchor="ctr"/>
-          <a:lstStyle/>
-          <a:p>
-            <a:pPr algn="r"/>
-            <a:r>
-              <a:t>256a</a:t>
-            </a:r>
-            <a:endParaRPr sz="1000" b="1">
-              <a:solidFill>
-                <a:srgbClr val="7A8A6E"/>
-              </a:solidFill>
-              <a:latin typeface="Calibri"/>
-            </a:endParaRPr>
-          </a:p>
-        </p:txBody>
-      </p:sp>
-    </p:spTree>
-  </p:cSld>
-  <p:clrMapOvr>
-    <a:masterClrMapping/>
-  </p:clrMapOvr>
-</p:sld>
-</file>
-
-<file path=ppt/slides/slide13.xml><?xml version="1.0" encoding="utf-8"?>
-<p:sld xmlns:a="http://schemas.openxmlformats.org/drawingml/2006/main" xmlns:p="http://schemas.openxmlformats.org/presentationml/2006/main" xmlns:r="http://schemas.openxmlformats.org/officeDocument/2006/relationships">
-  <p:cSld>
-    <p:spTree>
-      <p:nvGrpSpPr>
-        <p:cNvPr id="1" name=""/>
-        <p:cNvGrpSpPr/>
-        <p:nvPr/>
-      </p:nvGrpSpPr>
-      <p:grpSpPr/>
-      <p:sp>
-        <p:nvSpPr>
-          <p:cNvPr id="2" name="Rectangle 1"/>
-          <p:cNvSpPr/>
-          <p:nvPr/>
-        </p:nvSpPr>
-        <p:spPr>
-          <a:xfrm>
-            <a:off x="0" y="0"/>
-            <a:ext cx="12192000" cy="6858000"/>
-          </a:xfrm>
-          <a:prstGeom prst="rect">
-            <a:avLst/>
-          </a:prstGeom>
-          <a:solidFill>
-            <a:srgbClr val="FFFFFF"/>
-          </a:solidFill>
-          <a:ln>
-            <a:noFill/>
-          </a:ln>
-          <a:effectLst/>
-        </p:spPr>
-        <p:style>
-          <a:lnRef idx="1">
-            <a:schemeClr val="accent1"/>
-          </a:lnRef>
-          <a:fillRef idx="3">
-            <a:schemeClr val="accent1"/>
-          </a:fillRef>
-          <a:effectRef idx="2">
-            <a:schemeClr val="accent1"/>
-          </a:effectRef>
-          <a:fontRef idx="minor">
-            <a:schemeClr val="lt1"/>
-          </a:fontRef>
-        </p:style>
-        <p:txBody>
-          <a:bodyPr rtlCol="0" anchor="ctr"/>
-          <a:lstStyle/>
-          <a:p>
-            <a:pPr algn="ctr"/>
-          </a:p>
-        </p:txBody>
-      </p:sp>
-      <p:sp>
-        <p:nvSpPr>
-          <p:cNvPr id="3" name="TextBox 2"/>
-          <p:cNvSpPr txBox="1"/>
-          <p:nvPr/>
-        </p:nvSpPr>
-        <p:spPr>
-          <a:xfrm>
-            <a:off x="822960" y="502920"/>
-            <a:ext cx="10515600" cy="822960"/>
-          </a:xfrm>
-          <a:prstGeom prst="rect">
-            <a:avLst/>
-          </a:prstGeom>
-          <a:noFill/>
-        </p:spPr>
-        <p:txBody>
-          <a:bodyPr wrap="square">
-            <a:spAutoFit/>
-          </a:bodyPr>
-          <a:lstStyle/>
-          <a:p>
-            <a:r>
-              <a:rPr sz="2800" b="1">
-                <a:solidFill>
-                  <a:srgbClr val="2C5F2D"/>
-                </a:solidFill>
-                <a:latin typeface="Cambria"/>
-              </a:rPr>
-              <a:t>The Take-Home Sheet — the Daily Rhythm</a:t>
-            </a:r>
-          </a:p>
-        </p:txBody>
-      </p:sp>
-      <p:pic>
-        <p:nvPicPr>
-          <p:cNvPr id="4" name="Picture 3" descr="s21_part1.png"/>
-          <p:cNvPicPr>
-            <a:picLocks noChangeAspect="1"/>
-          </p:cNvPicPr>
-          <p:nvPr/>
-        </p:nvPicPr>
-        <p:blipFill>
-          <a:blip r:embed="rId2"/>
-          <a:stretch>
-            <a:fillRect/>
-          </a:stretch>
-        </p:blipFill>
-        <p:spPr>
-          <a:xfrm>
-            <a:off x="1798167" y="1463040"/>
-            <a:ext cx="8595360" cy="4039819"/>
-          </a:xfrm>
-          <a:prstGeom prst="rect">
-            <a:avLst/>
-          </a:prstGeom>
-          <a:ln w="12700">
-            <a:solidFill>
-              <a:srgbClr val="C8C8C8"/>
-            </a:solidFill>
-          </a:ln>
-        </p:spPr>
-      </p:pic>
-      <p:sp>
-        <p:nvSpPr>
-          <p:cNvPr id="5" name="TextBox 4"/>
-          <p:cNvSpPr txBox="1"/>
-          <p:nvPr/>
-        </p:nvSpPr>
-        <p:spPr>
-          <a:xfrm>
-            <a:off x="822960" y="6355080"/>
-            <a:ext cx="10515600" cy="411480"/>
-          </a:xfrm>
-          <a:prstGeom prst="rect">
-            <a:avLst/>
-          </a:prstGeom>
-          <a:noFill/>
-        </p:spPr>
-        <p:txBody>
-          <a:bodyPr wrap="square">
-            <a:spAutoFit/>
-          </a:bodyPr>
-          <a:lstStyle/>
-          <a:p>
-            <a:r>
-              <a:rPr sz="1400" i="1">
-                <a:solidFill>
-                  <a:srgbClr val="595959"/>
-                </a:solidFill>
-                <a:latin typeface="Calibri"/>
-              </a:rPr>
-              <a:t>Handed out now — this is the sheet in your hands.</a:t>
-            </a:r>
-          </a:p>
-        </p:txBody>
-      </p:sp>
-      <p:sp>
-        <p:nvSpPr>
-          <p:cNvPr id="90" name="SlideNum"/>
-          <p:cNvSpPr txBox="1"/>
-          <p:nvPr/>
-        </p:nvSpPr>
-        <p:spPr>
-          <a:xfrm>
-            <a:off x="11384280" y="6446520"/>
-            <a:ext cx="640080" cy="292608"/>
-          </a:xfrm>
-          <a:prstGeom prst="rect">
-            <a:avLst/>
-          </a:prstGeom>
-          <a:noFill/>
-        </p:spPr>
-        <p:txBody>
-          <a:bodyPr wrap="none" lIns="0" tIns="0" rIns="45720" bIns="0" anchor="ctr"/>
-          <a:lstStyle/>
-          <a:p>
-            <a:pPr algn="r"/>
-            <a:r>
-              <a:t>264</a:t>
-            </a:r>
-            <a:endParaRPr sz="1000" b="1">
-              <a:solidFill>
-                <a:srgbClr val="7A8A6E"/>
-              </a:solidFill>
-              <a:latin typeface="Calibri"/>
-            </a:endParaRPr>
-          </a:p>
-        </p:txBody>
-      </p:sp>
-    </p:spTree>
-  </p:cSld>
-  <p:clrMapOvr>
-    <a:masterClrMapping/>
-  </p:clrMapOvr>
-</p:sld>
-</file>
-
-<file path=ppt/slides/slide14.xml><?xml version="1.0" encoding="utf-8"?>
-<p:sld xmlns:a="http://schemas.openxmlformats.org/drawingml/2006/main" xmlns:p="http://schemas.openxmlformats.org/presentationml/2006/main" xmlns:r="http://schemas.openxmlformats.org/officeDocument/2006/relationships">
-  <p:cSld>
-    <p:spTree>
-      <p:nvGrpSpPr>
-        <p:cNvPr id="1" name=""/>
-        <p:cNvGrpSpPr/>
-        <p:nvPr/>
-      </p:nvGrpSpPr>
-      <p:grpSpPr/>
-      <p:sp>
-        <p:nvSpPr>
-          <p:cNvPr id="2" name="Rectangle 1"/>
-          <p:cNvSpPr/>
-          <p:nvPr/>
-        </p:nvSpPr>
-        <p:spPr>
-          <a:xfrm>
-            <a:off x="0" y="0"/>
-            <a:ext cx="12192000" cy="6858000"/>
-          </a:xfrm>
-          <a:prstGeom prst="rect">
-            <a:avLst/>
-          </a:prstGeom>
-          <a:solidFill>
-            <a:srgbClr val="FFFFFF"/>
-          </a:solidFill>
-          <a:ln>
-            <a:noFill/>
-          </a:ln>
-          <a:effectLst/>
-        </p:spPr>
-        <p:style>
-          <a:lnRef idx="1">
-            <a:schemeClr val="accent1"/>
-          </a:lnRef>
-          <a:fillRef idx="3">
-            <a:schemeClr val="accent1"/>
-          </a:fillRef>
-          <a:effectRef idx="2">
-            <a:schemeClr val="accent1"/>
-          </a:effectRef>
-          <a:fontRef idx="minor">
-            <a:schemeClr val="lt1"/>
-          </a:fontRef>
-        </p:style>
-        <p:txBody>
-          <a:bodyPr rtlCol="0" anchor="ctr"/>
-          <a:lstStyle/>
-          <a:p>
-            <a:pPr algn="ctr"/>
-          </a:p>
-        </p:txBody>
-      </p:sp>
-      <p:sp>
-        <p:nvSpPr>
-          <p:cNvPr id="3" name="TextBox 2"/>
-          <p:cNvSpPr txBox="1"/>
-          <p:nvPr/>
-        </p:nvSpPr>
-        <p:spPr>
-          <a:xfrm>
-            <a:off x="822960" y="502920"/>
-            <a:ext cx="10515600" cy="822960"/>
-          </a:xfrm>
-          <a:prstGeom prst="rect">
-            <a:avLst/>
-          </a:prstGeom>
-          <a:noFill/>
-        </p:spPr>
-        <p:txBody>
-          <a:bodyPr wrap="square">
-            <a:spAutoFit/>
-          </a:bodyPr>
-          <a:lstStyle/>
-          <a:p>
-            <a:r>
-              <a:rPr sz="2800" b="1">
-                <a:solidFill>
-                  <a:srgbClr val="2C5F2D"/>
-                </a:solidFill>
-                <a:latin typeface="Cambria"/>
-              </a:rPr>
-              <a:t>The Take-Home Sheet — the Four Parts</a:t>
-            </a:r>
-          </a:p>
-        </p:txBody>
-      </p:sp>
-      <p:pic>
-        <p:nvPicPr>
-          <p:cNvPr id="4" name="Picture 3" descr="s21_part2.png"/>
-          <p:cNvPicPr>
-            <a:picLocks noChangeAspect="1"/>
-          </p:cNvPicPr>
-          <p:nvPr/>
-        </p:nvPicPr>
-        <p:blipFill>
-          <a:blip r:embed="rId2"/>
-          <a:stretch>
-            <a:fillRect/>
-          </a:stretch>
-        </p:blipFill>
-        <p:spPr>
-          <a:xfrm>
-            <a:off x="2066004" y="1463040"/>
-            <a:ext cx="8059687" cy="4709160"/>
-          </a:xfrm>
-          <a:prstGeom prst="rect">
-            <a:avLst/>
-          </a:prstGeom>
-          <a:ln w="12700">
-            <a:solidFill>
-              <a:srgbClr val="C8C8C8"/>
-            </a:solidFill>
-          </a:ln>
-        </p:spPr>
-      </p:pic>
-      <p:sp>
-        <p:nvSpPr>
-          <p:cNvPr id="5" name="TextBox 4"/>
-          <p:cNvSpPr txBox="1"/>
-          <p:nvPr/>
-        </p:nvSpPr>
-        <p:spPr>
-          <a:xfrm>
-            <a:off x="822960" y="6355080"/>
-            <a:ext cx="10515600" cy="411480"/>
-          </a:xfrm>
-          <a:prstGeom prst="rect">
-            <a:avLst/>
-          </a:prstGeom>
-          <a:noFill/>
-        </p:spPr>
-        <p:txBody>
-          <a:bodyPr wrap="square">
-            <a:spAutoFit/>
-          </a:bodyPr>
-          <a:lstStyle/>
-          <a:p>
-            <a:r>
-              <a:rPr sz="1400" i="1">
-                <a:solidFill>
-                  <a:srgbClr val="595959"/>
-                </a:solidFill>
-                <a:latin typeface="Calibri"/>
-              </a:rPr>
-              <a:t>One practice at a time — and a partner expecting you at the end of week one.</a:t>
-            </a:r>
-          </a:p>
-        </p:txBody>
-      </p:sp>
-      <p:sp>
-        <p:nvSpPr>
-          <p:cNvPr id="90" name="SlideNum"/>
-          <p:cNvSpPr txBox="1"/>
-          <p:nvPr/>
-        </p:nvSpPr>
-        <p:spPr>
-          <a:xfrm>
-            <a:off x="11384280" y="6446520"/>
-            <a:ext cx="640080" cy="292608"/>
-          </a:xfrm>
-          <a:prstGeom prst="rect">
-            <a:avLst/>
-          </a:prstGeom>
-          <a:noFill/>
-        </p:spPr>
-        <p:txBody>
-          <a:bodyPr wrap="none" lIns="0" tIns="0" rIns="45720" bIns="0" anchor="ctr"/>
-          <a:lstStyle/>
-          <a:p>
-            <a:pPr algn="r"/>
-            <a:r>
-              <a:t>264a</a:t>
-            </a:r>
-            <a:endParaRPr sz="1000" b="1">
-              <a:solidFill>
-                <a:srgbClr val="7A8A6E"/>
-              </a:solidFill>
-              <a:latin typeface="Calibri"/>
-            </a:endParaRPr>
-          </a:p>
-        </p:txBody>
-      </p:sp>
-    </p:spTree>
-  </p:cSld>
-  <p:clrMapOvr>
-    <a:masterClrMapping/>
-  </p:clrMapOvr>
-</p:sld>
-</file>
-
 <file path=ppt/slides/slide2.xml><?xml version="1.0" encoding="utf-8"?>
 <p:sld xmlns:a="http://schemas.openxmlformats.org/drawingml/2006/main" xmlns:r="http://schemas.openxmlformats.org/officeDocument/2006/relationships" xmlns:p="http://schemas.openxmlformats.org/presentationml/2006/main">
   <p:cSld>
@@ -5991,6 +6033,211 @@
 </file>
 
 <file path=ppt/slides/slide3.xml><?xml version="1.0" encoding="utf-8"?>
+<p:sld xmlns:a="http://schemas.openxmlformats.org/drawingml/2006/main" xmlns:p="http://schemas.openxmlformats.org/presentationml/2006/main" xmlns:r="http://schemas.openxmlformats.org/officeDocument/2006/relationships">
+  <p:cSld>
+    <p:spTree>
+      <p:nvGrpSpPr>
+        <p:cNvPr id="1" name=""/>
+        <p:cNvGrpSpPr/>
+        <p:nvPr/>
+      </p:nvGrpSpPr>
+      <p:grpSpPr/>
+      <p:sp>
+        <p:nvSpPr>
+          <p:cNvPr id="2" name="Rectangle 1"/>
+          <p:cNvSpPr/>
+          <p:nvPr/>
+        </p:nvSpPr>
+        <p:spPr>
+          <a:xfrm>
+            <a:off x="0" y="0"/>
+            <a:ext cx="12192000" cy="6858000"/>
+          </a:xfrm>
+          <a:prstGeom prst="rect">
+            <a:avLst/>
+          </a:prstGeom>
+          <a:solidFill>
+            <a:srgbClr val="FFFFFF"/>
+          </a:solidFill>
+          <a:ln>
+            <a:noFill/>
+          </a:ln>
+          <a:effectLst/>
+        </p:spPr>
+        <p:style>
+          <a:lnRef idx="1">
+            <a:schemeClr val="accent1"/>
+          </a:lnRef>
+          <a:fillRef idx="3">
+            <a:schemeClr val="accent1"/>
+          </a:fillRef>
+          <a:effectRef idx="2">
+            <a:schemeClr val="accent1"/>
+          </a:effectRef>
+          <a:fontRef idx="minor">
+            <a:schemeClr val="lt1"/>
+          </a:fontRef>
+        </p:style>
+        <p:txBody>
+          <a:bodyPr rtlCol="0" anchor="ctr"/>
+          <a:lstStyle/>
+          <a:p>
+            <a:pPr algn="ctr"/>
+          </a:p>
+        </p:txBody>
+      </p:sp>
+      <p:sp>
+        <p:nvSpPr>
+          <p:cNvPr id="3" name="TextBox 2"/>
+          <p:cNvSpPr txBox="1"/>
+          <p:nvPr/>
+        </p:nvSpPr>
+        <p:spPr>
+          <a:xfrm>
+            <a:off x="822960" y="502920"/>
+            <a:ext cx="10515600" cy="822960"/>
+          </a:xfrm>
+          <a:prstGeom prst="rect">
+            <a:avLst/>
+          </a:prstGeom>
+          <a:noFill/>
+        </p:spPr>
+        <p:txBody>
+          <a:bodyPr wrap="square">
+            <a:spAutoFit/>
+          </a:bodyPr>
+          <a:lstStyle/>
+          <a:p>
+            <a:r>
+              <a:rPr sz="2800" b="1">
+                <a:solidFill>
+                  <a:srgbClr val="2C5F2D"/>
+                </a:solidFill>
+                <a:latin typeface="Cambria"/>
+              </a:rPr>
+              <a:t>Where We Are — the Four Connects</a:t>
+            </a:r>
+          </a:p>
+        </p:txBody>
+      </p:sp>
+      <p:sp>
+        <p:nvSpPr>
+          <p:cNvPr id="5" name="TextBox 4"/>
+          <p:cNvSpPr txBox="1"/>
+          <p:nvPr/>
+        </p:nvSpPr>
+        <p:spPr>
+          <a:xfrm>
+            <a:off x="822960" y="5623560"/>
+            <a:ext cx="10515600" cy="914400"/>
+          </a:xfrm>
+          <a:prstGeom prst="rect">
+            <a:avLst/>
+          </a:prstGeom>
+          <a:noFill/>
+        </p:spPr>
+        <p:txBody>
+          <a:bodyPr wrap="square">
+            <a:spAutoFit/>
+          </a:bodyPr>
+          <a:lstStyle/>
+          <a:p>
+            <a:r>
+              <a:rPr sz="1800" b="0">
+                <a:solidFill>
+                  <a:srgbClr val="222B22"/>
+                </a:solidFill>
+                <a:latin typeface="Calibri"/>
+              </a:rPr>
+              <a:t>Session 21 carries the whole map into the sending — </a:t>
+            </a:r>
+            <a:r>
+              <a:rPr sz="1800" b="1">
+                <a:solidFill>
+                  <a:srgbClr val="2C5F2D"/>
+                </a:solidFill>
+                <a:latin typeface="Calibri"/>
+              </a:rPr>
+              <a:t>all four Connects</a:t>
+            </a:r>
+            <a:r>
+              <a:rPr sz="1800" b="0">
+                <a:solidFill>
+                  <a:srgbClr val="222B22"/>
+                </a:solidFill>
+                <a:latin typeface="Calibri"/>
+              </a:rPr>
+              <a:t>, integrated. Each connection makes the next one real (Matt. 22:37–40).</a:t>
+            </a:r>
+          </a:p>
+        </p:txBody>
+      </p:sp>
+      <p:sp>
+        <p:nvSpPr>
+          <p:cNvPr id="90" name="SlideNum"/>
+          <p:cNvSpPr txBox="1"/>
+          <p:nvPr/>
+        </p:nvSpPr>
+        <p:spPr>
+          <a:xfrm>
+            <a:off x="11384280" y="6446520"/>
+            <a:ext cx="640080" cy="292608"/>
+          </a:xfrm>
+          <a:prstGeom prst="rect">
+            <a:avLst/>
+          </a:prstGeom>
+          <a:noFill/>
+        </p:spPr>
+        <p:txBody>
+          <a:bodyPr wrap="none" lIns="0" tIns="0" rIns="45720" bIns="0" anchor="ctr"/>
+          <a:lstStyle/>
+          <a:p>
+            <a:pPr algn="r"/>
+            <a:r>
+              <a:t>256a</a:t>
+            </a:r>
+            <a:endParaRPr sz="1000" b="1">
+              <a:solidFill>
+                <a:srgbClr val="7A8A6E"/>
+              </a:solidFill>
+              <a:latin typeface="Calibri"/>
+            </a:endParaRPr>
+          </a:p>
+        </p:txBody>
+      </p:sp>
+      <p:pic>
+        <p:nvPicPr>
+          <p:cNvPr id="91" name="Picture 90" descr="four-connects.png"/>
+          <p:cNvPicPr>
+            <a:picLocks noChangeAspect="1"/>
+          </p:cNvPicPr>
+          <p:nvPr/>
+        </p:nvPicPr>
+        <p:blipFill>
+          <a:blip r:embed="rId4"/>
+          <a:stretch>
+            <a:fillRect/>
+          </a:stretch>
+        </p:blipFill>
+        <p:spPr>
+          <a:xfrm>
+            <a:off x="932688" y="1645920"/>
+            <a:ext cx="10332720" cy="3708663"/>
+          </a:xfrm>
+          <a:prstGeom prst="rect">
+            <a:avLst/>
+          </a:prstGeom>
+        </p:spPr>
+      </p:pic>
+    </p:spTree>
+  </p:cSld>
+  <p:clrMapOvr>
+    <a:masterClrMapping/>
+  </p:clrMapOvr>
+</p:sld>
+</file>
+
+<file path=ppt/slides/slide4.xml><?xml version="1.0" encoding="utf-8"?>
 <p:sld xmlns:a="http://schemas.openxmlformats.org/drawingml/2006/main" xmlns:r="http://schemas.openxmlformats.org/officeDocument/2006/relationships" xmlns:p="http://schemas.openxmlformats.org/presentationml/2006/main">
   <p:cSld>
     <p:spTree>
@@ -6391,278 +6638,6 @@
 </p:sld>
 </file>
 
-<file path=ppt/slides/slide4.xml><?xml version="1.0" encoding="utf-8"?>
-<p:sld xmlns:a="http://schemas.openxmlformats.org/drawingml/2006/main" xmlns:r="http://schemas.openxmlformats.org/officeDocument/2006/relationships" xmlns:p="http://schemas.openxmlformats.org/presentationml/2006/main">
-  <p:cSld>
-    <p:spTree>
-      <p:nvGrpSpPr>
-        <p:cNvPr id="1" name=""/>
-        <p:cNvGrpSpPr/>
-        <p:nvPr/>
-      </p:nvGrpSpPr>
-      <p:grpSpPr>
-        <a:xfrm>
-          <a:off x="0" y="0"/>
-          <a:ext cx="0" cy="0"/>
-          <a:chOff x="0" y="0"/>
-          <a:chExt cx="0" cy="0"/>
-        </a:xfrm>
-      </p:grpSpPr>
-      <p:sp>
-        <p:nvSpPr>
-          <p:cNvPr id="2" name="Rectangle 1"/>
-          <p:cNvSpPr/>
-          <p:nvPr/>
-        </p:nvSpPr>
-        <p:spPr>
-          <a:xfrm>
-            <a:off x="0" y="0"/>
-            <a:ext cx="12191695" cy="6858000"/>
-          </a:xfrm>
-          <a:prstGeom prst="rect">
-            <a:avLst/>
-          </a:prstGeom>
-          <a:solidFill>
-            <a:srgbClr val="FFFFFF"/>
-          </a:solidFill>
-          <a:ln>
-            <a:noFill/>
-          </a:ln>
-        </p:spPr>
-        <p:txBody>
-          <a:bodyPr/>
-          <a:lstStyle/>
-          <a:p>
-            <a:endParaRPr/>
-          </a:p>
-        </p:txBody>
-      </p:sp>
-      <p:sp>
-        <p:nvSpPr>
-          <p:cNvPr id="3" name="TextBox 2"/>
-          <p:cNvSpPr txBox="1"/>
-          <p:nvPr/>
-        </p:nvSpPr>
-        <p:spPr>
-          <a:xfrm>
-            <a:off x="822960" y="502920"/>
-            <a:ext cx="10515600" cy="822960"/>
-          </a:xfrm>
-          <a:prstGeom prst="rect">
-            <a:avLst/>
-          </a:prstGeom>
-          <a:noFill/>
-        </p:spPr>
-        <p:txBody>
-          <a:bodyPr wrap="square">
-            <a:spAutoFit/>
-          </a:bodyPr>
-          <a:lstStyle/>
-          <a:p>
-            <a:pPr algn="l">
-              <a:spcAft>
-                <a:spcPts val="600"/>
-              </a:spcAft>
-            </a:pPr>
-            <a:r>
-              <a:rPr sz="2800" b="1" i="0">
-                <a:solidFill>
-                  <a:srgbClr val="2C5F2D"/>
-                </a:solidFill>
-                <a:latin typeface="Cambria"/>
-              </a:rPr>
-              <a:t>Welcome and Integration Teaching</a:t>
-            </a:r>
-          </a:p>
-        </p:txBody>
-      </p:sp>
-      <p:sp>
-        <p:nvSpPr>
-          <p:cNvPr id="4" name="TextBox 4"/>
-          <p:cNvSpPr txBox="1"/>
-          <p:nvPr/>
-        </p:nvSpPr>
-        <p:spPr>
-          <a:xfrm>
-            <a:off x="822960" y="1554480"/>
-            <a:ext cx="10515600" cy="4892040"/>
-          </a:xfrm>
-          <a:prstGeom prst="rect">
-            <a:avLst/>
-          </a:prstGeom>
-          <a:noFill/>
-        </p:spPr>
-        <p:txBody>
-          <a:bodyPr wrap="square" lIns="91440" tIns="91440" rIns="91440" bIns="91440"/>
-          <a:lstStyle/>
-          <a:p>
-            <a:pPr marL="274320" indent="-274320">
-              <a:spcAft>
-                <a:spcPts val="900"/>
-              </a:spcAft>
-            </a:pPr>
-            <a:r>
-              <a:rPr sz="2200" b="1" i="0">
-                <a:solidFill>
-                  <a:srgbClr val="97BC62"/>
-                </a:solidFill>
-                <a:latin typeface="Calibri"/>
-              </a:rPr>
-              <a:t>•  </a:t>
-            </a:r>
-            <a:r>
-              <a:rPr sz="2200" b="0" i="0">
-                <a:solidFill>
-                  <a:srgbClr val="222B22"/>
-                </a:solidFill>
-                <a:latin typeface="Calibri"/>
-              </a:rPr>
-              <a:t>Fourteen Wednesdays — the soil of the heart, our stories, confession and restoration, hearing God in scripture, the gardens of our hearts, the quiet doubts, what was prepared for us</a:t>
-            </a:r>
-          </a:p>
-          <a:p>
-            <a:pPr marL="274320" indent="-274320">
-              <a:spcAft>
-                <a:spcPts val="900"/>
-              </a:spcAft>
-            </a:pPr>
-            <a:r>
-              <a:rPr sz="2200" b="1" i="0">
-                <a:solidFill>
-                  <a:srgbClr val="97BC62"/>
-                </a:solidFill>
-                <a:latin typeface="Calibri"/>
-              </a:rPr>
-              <a:t>•  </a:t>
-            </a:r>
-            <a:r>
-              <a:rPr sz="2200" b="0" i="0">
-                <a:solidFill>
-                  <a:srgbClr val="222B22"/>
-                </a:solidFill>
-                <a:latin typeface="Calibri"/>
-              </a:rPr>
-              <a:t>Tonight is the integration. The four Connects are not separate disciplines — they are a sequence: Self, Others, God, Mission. Each one creates the conditions for the next.</a:t>
-            </a:r>
-          </a:p>
-          <a:p>
-            <a:pPr marL="274320" indent="-274320">
-              <a:spcAft>
-                <a:spcPts val="900"/>
-              </a:spcAft>
-            </a:pPr>
-            <a:r>
-              <a:rPr sz="2200" b="1" i="0">
-                <a:solidFill>
-                  <a:srgbClr val="97BC62"/>
-                </a:solidFill>
-                <a:latin typeface="Calibri"/>
-              </a:rPr>
-              <a:t>•  </a:t>
-            </a:r>
-            <a:r>
-              <a:rPr sz="2200" b="0" i="0">
-                <a:solidFill>
-                  <a:srgbClr val="222B22"/>
-                </a:solidFill>
-                <a:latin typeface="Calibri"/>
-              </a:rPr>
-              <a:t>They are also a way of life — lived in family, witnessed in community</a:t>
-            </a:r>
-          </a:p>
-          <a:p>
-            <a:pPr marL="274320" indent="-274320">
-              <a:spcAft>
-                <a:spcPts val="900"/>
-              </a:spcAft>
-            </a:pPr>
-            <a:r>
-              <a:rPr sz="2200" b="1" i="0">
-                <a:solidFill>
-                  <a:srgbClr val="97BC62"/>
-                </a:solidFill>
-                <a:latin typeface="Calibri"/>
-              </a:rPr>
-              <a:t>•  </a:t>
-            </a:r>
-            <a:r>
-              <a:rPr sz="2200" b="0" i="0">
-                <a:solidFill>
-                  <a:srgbClr val="222B22"/>
-                </a:solidFill>
-                <a:latin typeface="Calibri"/>
-              </a:rPr>
-              <a:t>Tonight: each parent-and-teen pair stands in the center; each speaks a specific witnessed blessing over the other; the whole community speaks the Aaronic blessing over each family</a:t>
-            </a:r>
-          </a:p>
-          <a:p>
-            <a:pPr marL="274320" indent="-274320">
-              <a:spcAft>
-                <a:spcPts val="900"/>
-              </a:spcAft>
-            </a:pPr>
-            <a:r>
-              <a:rPr sz="2200" b="1" i="0">
-                <a:solidFill>
-                  <a:srgbClr val="97BC62"/>
-                </a:solidFill>
-                <a:latin typeface="Calibri"/>
-              </a:rPr>
-              <a:t>•  </a:t>
-            </a:r>
-            <a:r>
-              <a:rPr sz="2200" b="0" i="0">
-                <a:solidFill>
-                  <a:srgbClr val="222B22"/>
-                </a:solidFill>
-                <a:latin typeface="Calibri"/>
-              </a:rPr>
-              <a:t>If you are new tonight: your job is to bear witness. Your presence is the gift.</a:t>
-            </a:r>
-          </a:p>
-        </p:txBody>
-      </p:sp>
-      <p:sp>
-        <p:nvSpPr>
-          <p:cNvPr id="90" name="SlideNum"/>
-          <p:cNvSpPr txBox="1"/>
-          <p:nvPr/>
-        </p:nvSpPr>
-        <p:spPr>
-          <a:xfrm>
-            <a:off x="11384280" y="6446520"/>
-            <a:ext cx="640080" cy="292608"/>
-          </a:xfrm>
-          <a:prstGeom prst="rect">
-            <a:avLst/>
-          </a:prstGeom>
-          <a:noFill/>
-        </p:spPr>
-        <p:txBody>
-          <a:bodyPr wrap="none" lIns="0" tIns="0" rIns="45720" bIns="0" anchor="ctr"/>
-          <a:lstStyle/>
-          <a:p>
-            <a:pPr algn="r"/>
-            <a:r>
-              <a:t>258</a:t>
-            </a:r>
-            <a:endParaRPr sz="1000" b="1">
-              <a:solidFill>
-                <a:srgbClr val="7A8A6E"/>
-              </a:solidFill>
-              <a:latin typeface="Calibri"/>
-            </a:endParaRPr>
-          </a:p>
-        </p:txBody>
-      </p:sp>
-    </p:spTree>
-  </p:cSld>
-  <p:clrMapOvr>
-    <a:masterClrMapping/>
-  </p:clrMapOvr>
-</p:sld>
-</file>
-
 <file path=ppt/slides/slide5.xml><?xml version="1.0" encoding="utf-8"?>
 <p:sld xmlns:a="http://schemas.openxmlformats.org/drawingml/2006/main" xmlns:r="http://schemas.openxmlformats.org/officeDocument/2006/relationships" xmlns:p="http://schemas.openxmlformats.org/presentationml/2006/main">
   <p:cSld>
@@ -6743,7 +6718,7 @@
                 </a:solidFill>
                 <a:latin typeface="Cambria"/>
               </a:rPr>
-              <a:t>Brief Blessing Rehearsal — the Form</a:t>
+              <a:t>Welcome and Integration Teaching</a:t>
             </a:r>
           </a:p>
         </p:txBody>
@@ -6770,11 +6745,11 @@
           <a:p>
             <a:pPr marL="274320" indent="-274320">
               <a:spcAft>
-                <a:spcPts val="750"/>
+                <a:spcPts val="900"/>
               </a:spcAft>
             </a:pPr>
             <a:r>
-              <a:rPr sz="2400" b="1" i="0">
+              <a:rPr sz="2200" b="1" i="0">
                 <a:solidFill>
                   <a:srgbClr val="97BC62"/>
                 </a:solidFill>
@@ -6783,98 +6758,98 @@
               <a:t>•  </a:t>
             </a:r>
             <a:r>
-              <a:rPr sz="2400" b="0" i="0">
+              <a:rPr sz="2200" b="0" i="0">
                 <a:solidFill>
                   <a:srgbClr val="222B22"/>
                 </a:solidFill>
                 <a:latin typeface="Calibri"/>
               </a:rPr>
-              <a:t>Three sentences. Just three. The worksheet you got Friday has the form.</a:t>
-            </a:r>
-          </a:p>
-          <a:p>
-            <a:pPr marL="342900" indent="-342900">
+              <a:t>Fourteen Wednesdays — the soil of the heart, our stories, confession and restoration, hearing God in scripture, the gardens of our hearts, the quiet doubts, what was prepared for us</a:t>
+            </a:r>
+          </a:p>
+          <a:p>
+            <a:pPr marL="274320" indent="-274320">
               <a:spcAft>
-                <a:spcPts val="750"/>
+                <a:spcPts val="900"/>
               </a:spcAft>
             </a:pPr>
             <a:r>
-              <a:rPr sz="2400" b="1" i="0">
+              <a:rPr sz="2200" b="1" i="0">
                 <a:solidFill>
                   <a:srgbClr val="97BC62"/>
                 </a:solidFill>
                 <a:latin typeface="Calibri"/>
               </a:rPr>
-              <a:t>1   </a:t>
-            </a:r>
-            <a:r>
-              <a:rPr sz="2400" b="0" i="0">
+              <a:t>•  </a:t>
+            </a:r>
+            <a:r>
+              <a:rPr sz="2200" b="0" i="0">
                 <a:solidFill>
                   <a:srgbClr val="222B22"/>
                 </a:solidFill>
                 <a:latin typeface="Calibri"/>
               </a:rPr>
-              <a:t>“What I have specifically seen God doing in you across Getting Started is _____.” Something you actually noticed.</a:t>
-            </a:r>
-          </a:p>
-          <a:p>
-            <a:pPr marL="342900" indent="-342900">
+              <a:t>Tonight is the integration. The four Connects are not separate disciplines — they are a sequence: Self, Others, God, Mission. Each one creates the conditions for the next.</a:t>
+            </a:r>
+          </a:p>
+          <a:p>
+            <a:pPr marL="274320" indent="-274320">
               <a:spcAft>
-                <a:spcPts val="750"/>
+                <a:spcPts val="900"/>
               </a:spcAft>
             </a:pPr>
             <a:r>
-              <a:rPr sz="2400" b="1" i="0">
+              <a:rPr sz="2200" b="1" i="0">
                 <a:solidFill>
                   <a:srgbClr val="97BC62"/>
                 </a:solidFill>
                 <a:latin typeface="Calibri"/>
               </a:rPr>
-              <a:t>2   </a:t>
-            </a:r>
-            <a:r>
-              <a:rPr sz="2400" b="0" i="0">
+              <a:t>•  </a:t>
+            </a:r>
+            <a:r>
+              <a:rPr sz="2200" b="0" i="0">
                 <a:solidFill>
                   <a:srgbClr val="222B22"/>
                 </a:solidFill>
                 <a:latin typeface="Calibri"/>
               </a:rPr>
-              <a:t>“What I bless in you tonight is _____.” Something true about who they are.</a:t>
-            </a:r>
-          </a:p>
-          <a:p>
-            <a:pPr marL="342900" indent="-342900">
+              <a:t>They are also a way of life — lived in family, witnessed in community</a:t>
+            </a:r>
+          </a:p>
+          <a:p>
+            <a:pPr marL="274320" indent="-274320">
               <a:spcAft>
-                <a:spcPts val="750"/>
+                <a:spcPts val="900"/>
               </a:spcAft>
             </a:pPr>
             <a:r>
-              <a:rPr sz="2400" b="1" i="0">
+              <a:rPr sz="2200" b="1" i="0">
                 <a:solidFill>
                   <a:srgbClr val="97BC62"/>
                 </a:solidFill>
                 <a:latin typeface="Calibri"/>
               </a:rPr>
-              <a:t>3   </a:t>
-            </a:r>
-            <a:r>
-              <a:rPr sz="2400" b="0" i="0">
+              <a:t>•  </a:t>
+            </a:r>
+            <a:r>
+              <a:rPr sz="2200" b="0" i="0">
                 <a:solidFill>
                   <a:srgbClr val="222B22"/>
                 </a:solidFill>
                 <a:latin typeface="Calibri"/>
               </a:rPr>
-              <a:t>“What I commit to you in our relationship moving forward is _____.” Something you will actually do.</a:t>
+              <a:t>Tonight: each parent-and-teen pair stands in the center; each speaks a specific witnessed blessing over the other; the whole community speaks the Aaronic blessing over each family</a:t>
             </a:r>
           </a:p>
           <a:p>
             <a:pPr marL="274320" indent="-274320">
               <a:spcAft>
-                <a:spcPts val="750"/>
+                <a:spcPts val="900"/>
               </a:spcAft>
             </a:pPr>
             <a:r>
-              <a:rPr sz="2400" b="1" i="0">
+              <a:rPr sz="2200" b="1" i="0">
                 <a:solidFill>
                   <a:srgbClr val="97BC62"/>
                 </a:solidFill>
@@ -6883,38 +6858,13 @@
               <a:t>•  </a:t>
             </a:r>
             <a:r>
-              <a:rPr sz="2400" b="0" i="0">
+              <a:rPr sz="2200" b="0" i="0">
                 <a:solidFill>
                   <a:srgbClr val="222B22"/>
                 </a:solidFill>
                 <a:latin typeface="Calibri"/>
               </a:rPr>
-              <a:t>The brevity is the discipline — we are not making speeches; we are speaking truth in front of witnesses</a:t>
-            </a:r>
-          </a:p>
-          <a:p>
-            <a:pPr marL="274320" indent="-274320">
-              <a:spcAft>
-                <a:spcPts val="750"/>
-              </a:spcAft>
-            </a:pPr>
-            <a:r>
-              <a:rPr sz="2400" b="1" i="0">
-                <a:solidFill>
-                  <a:srgbClr val="97BC62"/>
-                </a:solidFill>
-                <a:latin typeface="Calibri"/>
-              </a:rPr>
-              <a:t>•  </a:t>
-            </a:r>
-            <a:r>
-              <a:rPr sz="2400" b="0" i="0">
-                <a:solidFill>
-                  <a:srgbClr val="222B22"/>
-                </a:solidFill>
-                <a:latin typeface="Calibri"/>
-              </a:rPr>
-              <a:t>Two Companions demo a real blessing, then brief questions</a:t>
+              <a:t>If you are new tonight: your job is to bear witness. Your presence is the gift.</a:t>
             </a:r>
           </a:p>
         </p:txBody>
@@ -6941,7 +6891,7 @@
           <a:p>
             <a:pPr algn="r"/>
             <a:r>
-              <a:t>259</a:t>
+              <a:t>258</a:t>
             </a:r>
             <a:endParaRPr sz="1000" b="1">
               <a:solidFill>
@@ -7040,7 +6990,7 @@
                 </a:solidFill>
                 <a:latin typeface="Cambria"/>
               </a:rPr>
-              <a:t>Reading and Prayer</a:t>
+              <a:t>Brief Blessing Rehearsal — the Form</a:t>
             </a:r>
           </a:p>
         </p:txBody>
@@ -7053,8 +7003,8 @@
         </p:nvSpPr>
         <p:spPr>
           <a:xfrm>
-            <a:off x="822960" y="1600200"/>
-            <a:ext cx="5669280" cy="4572000"/>
+            <a:off x="822960" y="1554480"/>
+            <a:ext cx="10515600" cy="4892040"/>
           </a:xfrm>
           <a:prstGeom prst="rect">
             <a:avLst/>
@@ -7067,11 +7017,11 @@
           <a:p>
             <a:pPr marL="274320" indent="-274320">
               <a:spcAft>
-                <a:spcPts val="800"/>
+                <a:spcPts val="750"/>
               </a:spcAft>
             </a:pPr>
             <a:r>
-              <a:rPr sz="2000" b="1" i="0">
+              <a:rPr sz="2400" b="1" i="0">
                 <a:solidFill>
                   <a:srgbClr val="97BC62"/>
                 </a:solidFill>
@@ -7080,23 +7030,98 @@
               <a:t>•  </a:t>
             </a:r>
             <a:r>
-              <a:rPr sz="2000" b="0" i="0">
+              <a:rPr sz="2400" b="0" i="0">
                 <a:solidFill>
                   <a:srgbClr val="222B22"/>
                 </a:solidFill>
                 <a:latin typeface="Calibri"/>
               </a:rPr>
-              <a:t>Two scriptures before we begin — the blessing itself, and what we are commissioning each other into</a:t>
+              <a:t>Three sentences. Just three. The worksheet you got Friday has the form.</a:t>
+            </a:r>
+          </a:p>
+          <a:p>
+            <a:pPr marL="342900" indent="-342900">
+              <a:spcAft>
+                <a:spcPts val="750"/>
+              </a:spcAft>
+            </a:pPr>
+            <a:r>
+              <a:rPr sz="2400" b="1" i="0">
+                <a:solidFill>
+                  <a:srgbClr val="97BC62"/>
+                </a:solidFill>
+                <a:latin typeface="Calibri"/>
+              </a:rPr>
+              <a:t>1   </a:t>
+            </a:r>
+            <a:r>
+              <a:rPr sz="2400" b="0" i="0">
+                <a:solidFill>
+                  <a:srgbClr val="222B22"/>
+                </a:solidFill>
+                <a:latin typeface="Calibri"/>
+              </a:rPr>
+              <a:t>“What I have specifically seen God doing in you across Getting Started is _____.” Something you actually noticed.</a:t>
+            </a:r>
+          </a:p>
+          <a:p>
+            <a:pPr marL="342900" indent="-342900">
+              <a:spcAft>
+                <a:spcPts val="750"/>
+              </a:spcAft>
+            </a:pPr>
+            <a:r>
+              <a:rPr sz="2400" b="1" i="0">
+                <a:solidFill>
+                  <a:srgbClr val="97BC62"/>
+                </a:solidFill>
+                <a:latin typeface="Calibri"/>
+              </a:rPr>
+              <a:t>2   </a:t>
+            </a:r>
+            <a:r>
+              <a:rPr sz="2400" b="0" i="0">
+                <a:solidFill>
+                  <a:srgbClr val="222B22"/>
+                </a:solidFill>
+                <a:latin typeface="Calibri"/>
+              </a:rPr>
+              <a:t>“What I bless in you tonight is _____.” Something true about who they are.</a:t>
+            </a:r>
+          </a:p>
+          <a:p>
+            <a:pPr marL="342900" indent="-342900">
+              <a:spcAft>
+                <a:spcPts val="750"/>
+              </a:spcAft>
+            </a:pPr>
+            <a:r>
+              <a:rPr sz="2400" b="1" i="0">
+                <a:solidFill>
+                  <a:srgbClr val="97BC62"/>
+                </a:solidFill>
+                <a:latin typeface="Calibri"/>
+              </a:rPr>
+              <a:t>3   </a:t>
+            </a:r>
+            <a:r>
+              <a:rPr sz="2400" b="0" i="0">
+                <a:solidFill>
+                  <a:srgbClr val="222B22"/>
+                </a:solidFill>
+                <a:latin typeface="Calibri"/>
+              </a:rPr>
+              <a:t>“What I commit to you in our relationship moving forward is _____.” Something you will actually do.</a:t>
             </a:r>
           </a:p>
           <a:p>
             <a:pPr marL="274320" indent="-274320">
               <a:spcAft>
-                <a:spcPts val="800"/>
+                <a:spcPts val="750"/>
               </a:spcAft>
             </a:pPr>
             <a:r>
-              <a:rPr sz="2000" b="1" i="0">
+              <a:rPr sz="2400" b="1" i="0">
                 <a:solidFill>
                   <a:srgbClr val="97BC62"/>
                 </a:solidFill>
@@ -7105,23 +7130,23 @@
               <a:t>•  </a:t>
             </a:r>
             <a:r>
-              <a:rPr sz="2000" b="0" i="0">
+              <a:rPr sz="2400" b="0" i="0">
                 <a:solidFill>
                   <a:srgbClr val="222B22"/>
                 </a:solidFill>
                 <a:latin typeface="Calibri"/>
               </a:rPr>
-              <a:t>The Aaronic blessing is not a generic prayer — it is the specific words God gave Aaron and his sons to speak over Israel. When we speak it over each other, we are not improvising.</a:t>
+              <a:t>The brevity is the discipline — we are not making speeches; we are speaking truth in front of witnesses</a:t>
             </a:r>
           </a:p>
           <a:p>
             <a:pPr marL="274320" indent="-274320">
               <a:spcAft>
-                <a:spcPts val="800"/>
+                <a:spcPts val="750"/>
               </a:spcAft>
             </a:pPr>
             <a:r>
-              <a:rPr sz="2000" b="1" i="0">
+              <a:rPr sz="2400" b="1" i="0">
                 <a:solidFill>
                   <a:srgbClr val="97BC62"/>
                 </a:solidFill>
@@ -7130,150 +7155,13 @@
               <a:t>•  </a:t>
             </a:r>
             <a:r>
-              <a:rPr sz="2000" b="0" i="0">
+              <a:rPr sz="2400" b="0" i="0">
                 <a:solidFill>
                   <a:srgbClr val="222B22"/>
                 </a:solidFill>
                 <a:latin typeface="Calibri"/>
               </a:rPr>
-              <a:t>Philippians 1:6 — Getting Started is not the completion; it is part of the beginning. The next stretch is a longer work that is His to finish, not ours.</a:t>
-            </a:r>
-          </a:p>
-          <a:p>
-            <a:pPr marL="685800" indent="-274320">
-              <a:spcAft>
-                <a:spcPts val="600"/>
-              </a:spcAft>
-            </a:pPr>
-            <a:r>
-              <a:rPr sz="1800" b="1" i="0">
-                <a:solidFill>
-                  <a:srgbClr val="97BC62"/>
-                </a:solidFill>
-                <a:latin typeface="Calibri"/>
-              </a:rPr>
-              <a:t>–  </a:t>
-            </a:r>
-            <a:r>
-              <a:rPr sz="1800" b="0" i="1">
-                <a:solidFill>
-                  <a:srgbClr val="222B22"/>
-                </a:solidFill>
-                <a:latin typeface="Calibri"/>
-              </a:rPr>
-              <a:t>“And I am sure of this, that he who began a good work in you will bring it to completion at the day of Jesus Christ.” — Philippians 1:6</a:t>
-            </a:r>
-          </a:p>
-          <a:p>
-            <a:pPr marL="274320" indent="-274320">
-              <a:spcAft>
-                <a:spcPts val="800"/>
-              </a:spcAft>
-            </a:pPr>
-            <a:r>
-              <a:rPr sz="2000" b="1" i="0">
-                <a:solidFill>
-                  <a:srgbClr val="97BC62"/>
-                </a:solidFill>
-                <a:latin typeface="Calibri"/>
-              </a:rPr>
-              <a:t>•  </a:t>
-            </a:r>
-            <a:r>
-              <a:rPr sz="2000" b="0" i="0">
-                <a:solidFill>
-                  <a:srgbClr val="222B22"/>
-                </a:solidFill>
-                <a:latin typeface="Calibri"/>
-              </a:rPr>
-              <a:t>Then prayer over the commissioning to come</a:t>
-            </a:r>
-          </a:p>
-        </p:txBody>
-      </p:sp>
-      <p:sp>
-        <p:nvSpPr>
-          <p:cNvPr id="6" name="TextBox 6"/>
-          <p:cNvSpPr txBox="1"/>
-          <p:nvPr/>
-        </p:nvSpPr>
-        <p:spPr>
-          <a:xfrm>
-            <a:off x="6766560" y="1737360"/>
-            <a:ext cx="4663440" cy="2926080"/>
-          </a:xfrm>
-          <a:prstGeom prst="rect">
-            <a:avLst/>
-          </a:prstGeom>
-          <a:solidFill>
-            <a:srgbClr val="F1F6EC"/>
-          </a:solidFill>
-        </p:spPr>
-        <p:txBody>
-          <a:bodyPr wrap="square" lIns="91440" tIns="91440" rIns="91440" bIns="91440" anchor="ctr"/>
-          <a:lstStyle/>
-          <a:p>
-            <a:pPr>
-              <a:spcAft>
-                <a:spcPts val="900"/>
-              </a:spcAft>
-            </a:pPr>
-            <a:r>
-              <a:rPr sz="1200" b="1" i="0">
-                <a:solidFill>
-                  <a:srgbClr val="97BC62"/>
-                </a:solidFill>
-                <a:latin typeface="Calibri"/>
-              </a:rPr>
-              <a:t>NUMBERS 6:24–26</a:t>
-            </a:r>
-          </a:p>
-          <a:p>
-            <a:pPr>
-              <a:spcAft>
-                <a:spcPts val="600"/>
-              </a:spcAft>
-            </a:pPr>
-            <a:r>
-              <a:rPr sz="2400" b="0" i="1">
-                <a:solidFill>
-                  <a:srgbClr val="222B22"/>
-                </a:solidFill>
-                <a:latin typeface="Cambria"/>
-              </a:rPr>
-              <a:t>“The Lord bless you and keep you;</a:t>
-            </a:r>
-          </a:p>
-          <a:p>
-            <a:pPr>
-              <a:spcAft>
-                <a:spcPts val="600"/>
-              </a:spcAft>
-            </a:pPr>
-            <a:r>
-              <a:rPr sz="2400" b="0" i="1">
-                <a:solidFill>
-                  <a:srgbClr val="222B22"/>
-                </a:solidFill>
-                <a:latin typeface="Cambria"/>
-              </a:rPr>
-              <a:t>the Lord make his face to shine upon you and be gracious to you;</a:t>
-            </a:r>
-          </a:p>
-          <a:p>
-            <a:pPr>
-              <a:spcAft>
-                <a:spcPts val="600"/>
-              </a:spcAft>
-            </a:pPr>
-            <a:r>
-              <a:rPr sz="2400" b="0" i="1">
-                <a:solidFill>
-                  <a:srgbClr val="222B22"/>
-                </a:solidFill>
-                <a:latin typeface="Cambria"/>
-              </a:rPr>
-              <a:t>the Lord lift up his countenance upon you and give you peace.”</a:t>
+              <a:t>Two Companions demo a real blessing, then brief questions</a:t>
             </a:r>
           </a:p>
         </p:txBody>
@@ -7300,7 +7188,7 @@
           <a:p>
             <a:pPr algn="r"/>
             <a:r>
-              <a:t>260</a:t>
+              <a:t>259</a:t>
             </a:r>
             <a:endParaRPr sz="1000" b="1">
               <a:solidFill>
@@ -7399,7 +7287,7 @@
                 </a:solidFill>
                 <a:latin typeface="Cambria"/>
               </a:rPr>
-              <a:t>Family Commissionings</a:t>
+              <a:t>Reading and Prayer</a:t>
             </a:r>
           </a:p>
         </p:txBody>
@@ -7412,8 +7300,8 @@
         </p:nvSpPr>
         <p:spPr>
           <a:xfrm>
-            <a:off x="822960" y="1554480"/>
-            <a:ext cx="10515600" cy="4892040"/>
+            <a:off x="822960" y="1600200"/>
+            <a:ext cx="5669280" cy="4572000"/>
           </a:xfrm>
           <a:prstGeom prst="rect">
             <a:avLst/>
@@ -7426,11 +7314,11 @@
           <a:p>
             <a:pPr marL="274320" indent="-274320">
               <a:spcAft>
-                <a:spcPts val="750"/>
+                <a:spcPts val="800"/>
               </a:spcAft>
             </a:pPr>
             <a:r>
-              <a:rPr sz="2400" b="1" i="0">
+              <a:rPr sz="2000" b="1" i="0">
                 <a:solidFill>
                   <a:srgbClr val="97BC62"/>
                 </a:solidFill>
@@ -7439,138 +7327,200 @@
               <a:t>•  </a:t>
             </a:r>
             <a:r>
-              <a:rPr sz="2400" b="0" i="0">
+              <a:rPr sz="2000" b="0" i="0">
                 <a:solidFill>
                   <a:srgbClr val="222B22"/>
                 </a:solidFill>
                 <a:latin typeface="Calibri"/>
               </a:rPr>
-              <a:t>Each family in turn — parent and teen stand in the center; the rest of the family stands behind them in support</a:t>
-            </a:r>
-          </a:p>
-          <a:p>
-            <a:pPr marL="342900" indent="-342900">
+              <a:t>Two scriptures before we begin — the blessing itself, and what we are commissioning each other into</a:t>
+            </a:r>
+          </a:p>
+          <a:p>
+            <a:pPr marL="274320" indent="-274320">
               <a:spcAft>
-                <a:spcPts val="750"/>
+                <a:spcPts val="800"/>
               </a:spcAft>
             </a:pPr>
             <a:r>
-              <a:rPr sz="2400" b="1" i="0">
+              <a:rPr sz="2000" b="1" i="0">
                 <a:solidFill>
                   <a:srgbClr val="97BC62"/>
                 </a:solidFill>
                 <a:latin typeface="Calibri"/>
               </a:rPr>
-              <a:t>1   </a:t>
-            </a:r>
-            <a:r>
-              <a:rPr sz="2400" b="0" i="0">
+              <a:t>•  </a:t>
+            </a:r>
+            <a:r>
+              <a:rPr sz="2000" b="0" i="0">
                 <a:solidFill>
                   <a:srgbClr val="222B22"/>
                 </a:solidFill>
                 <a:latin typeface="Calibri"/>
               </a:rPr>
-              <a:t>Brief framing — “We have walked with [name] through Getting Started; we have seen _____.”</a:t>
-            </a:r>
-          </a:p>
-          <a:p>
-            <a:pPr marL="342900" indent="-342900">
+              <a:t>The Aaronic blessing is not a generic prayer — it is the specific words God gave Aaron and his sons to speak over Israel. When we speak it over each other, we are not improvising.</a:t>
+            </a:r>
+          </a:p>
+          <a:p>
+            <a:pPr marL="274320" indent="-274320">
               <a:spcAft>
-                <a:spcPts val="750"/>
+                <a:spcPts val="800"/>
               </a:spcAft>
             </a:pPr>
             <a:r>
-              <a:rPr sz="2400" b="1" i="0">
+              <a:rPr sz="2000" b="1" i="0">
                 <a:solidFill>
                   <a:srgbClr val="97BC62"/>
                 </a:solidFill>
                 <a:latin typeface="Calibri"/>
               </a:rPr>
-              <a:t>2   </a:t>
-            </a:r>
-            <a:r>
-              <a:rPr sz="2400" b="0" i="0">
+              <a:t>•  </a:t>
+            </a:r>
+            <a:r>
+              <a:rPr sz="2000" b="0" i="0">
                 <a:solidFill>
                   <a:srgbClr val="222B22"/>
                 </a:solidFill>
                 <a:latin typeface="Calibri"/>
               </a:rPr>
-              <a:t>Teen blesses parent first — the three sentences</a:t>
-            </a:r>
-          </a:p>
-          <a:p>
-            <a:pPr marL="342900" indent="-342900">
+              <a:t>Philippians 1:6 — Getting Started is not the completion; it is part of the beginning. The next stretch is a longer work that is His to finish, not ours.</a:t>
+            </a:r>
+          </a:p>
+          <a:p>
+            <a:pPr marL="685800" indent="-274320">
               <a:spcAft>
-                <a:spcPts val="750"/>
+                <a:spcPts val="600"/>
               </a:spcAft>
             </a:pPr>
             <a:r>
-              <a:rPr sz="2400" b="1" i="0">
+              <a:rPr sz="1800" b="1" i="0">
                 <a:solidFill>
                   <a:srgbClr val="97BC62"/>
                 </a:solidFill>
                 <a:latin typeface="Calibri"/>
               </a:rPr>
-              <a:t>3   </a:t>
-            </a:r>
-            <a:r>
-              <a:rPr sz="2400" b="0" i="0">
+              <a:t>–  </a:t>
+            </a:r>
+            <a:r>
+              <a:rPr sz="1800" b="0" i="1">
                 <a:solidFill>
                   <a:srgbClr val="222B22"/>
                 </a:solidFill>
                 <a:latin typeface="Calibri"/>
               </a:rPr>
-              <a:t>Parent blesses teen — the three sentences</a:t>
-            </a:r>
-          </a:p>
-          <a:p>
-            <a:pPr marL="342900" indent="-342900">
+              <a:t>“And I am sure of this, that he who began a good work in you will bring it to completion at the day of Jesus Christ.” — Philippians 1:6</a:t>
+            </a:r>
+          </a:p>
+          <a:p>
+            <a:pPr marL="274320" indent="-274320">
               <a:spcAft>
-                <a:spcPts val="750"/>
+                <a:spcPts val="800"/>
               </a:spcAft>
             </a:pPr>
             <a:r>
-              <a:rPr sz="2400" b="1" i="0">
+              <a:rPr sz="2000" b="1" i="0">
                 <a:solidFill>
                   <a:srgbClr val="97BC62"/>
                 </a:solidFill>
                 <a:latin typeface="Calibri"/>
               </a:rPr>
-              <a:t>4   </a:t>
-            </a:r>
-            <a:r>
-              <a:rPr sz="2400" b="0" i="0">
+              <a:t>•  </a:t>
+            </a:r>
+            <a:r>
+              <a:rPr sz="2000" b="0" i="0">
                 <a:solidFill>
                   <a:srgbClr val="222B22"/>
                 </a:solidFill>
                 <a:latin typeface="Calibri"/>
               </a:rPr>
-              <a:t>“Family of [last name], the community now blesses you.” The whole room speaks the Aaronic blessing aloud together, slowly.</a:t>
-            </a:r>
-          </a:p>
-          <a:p>
-            <a:pPr marL="274320" indent="-274320">
+              <a:t>Then prayer over the commissioning to come</a:t>
+            </a:r>
+          </a:p>
+        </p:txBody>
+      </p:sp>
+      <p:sp>
+        <p:nvSpPr>
+          <p:cNvPr id="6" name="TextBox 6"/>
+          <p:cNvSpPr txBox="1"/>
+          <p:nvPr/>
+        </p:nvSpPr>
+        <p:spPr>
+          <a:xfrm>
+            <a:off x="6766560" y="1737360"/>
+            <a:ext cx="4663440" cy="2926080"/>
+          </a:xfrm>
+          <a:prstGeom prst="rect">
+            <a:avLst/>
+          </a:prstGeom>
+          <a:solidFill>
+            <a:srgbClr val="F1F6EC"/>
+          </a:solidFill>
+        </p:spPr>
+        <p:txBody>
+          <a:bodyPr wrap="square" lIns="91440" tIns="91440" rIns="91440" bIns="91440" anchor="ctr"/>
+          <a:lstStyle/>
+          <a:p>
+            <a:pPr>
               <a:spcAft>
-                <a:spcPts val="750"/>
+                <a:spcPts val="900"/>
               </a:spcAft>
             </a:pPr>
             <a:r>
-              <a:rPr sz="2400" b="1" i="0">
+              <a:rPr sz="1200" b="1" i="0">
                 <a:solidFill>
                   <a:srgbClr val="97BC62"/>
                 </a:solidFill>
                 <a:latin typeface="Calibri"/>
               </a:rPr>
-              <a:t>•  </a:t>
-            </a:r>
-            <a:r>
-              <a:rPr sz="2400" b="0" i="0">
+              <a:t>NUMBERS 6:24–26</a:t>
+            </a:r>
+          </a:p>
+          <a:p>
+            <a:pPr>
+              <a:spcAft>
+                <a:spcPts val="600"/>
+              </a:spcAft>
+            </a:pPr>
+            <a:r>
+              <a:rPr sz="2400" b="0" i="1">
                 <a:solidFill>
                   <a:srgbClr val="222B22"/>
                 </a:solidFill>
-                <a:latin typeface="Calibri"/>
-              </a:rPr>
-              <a:t>If you freeze — take your time, or ask the other person to read your worksheet for you. If you cry, that is fine. The room can wait.</a:t>
+                <a:latin typeface="Cambria"/>
+              </a:rPr>
+              <a:t>“The Lord bless you and keep you;</a:t>
+            </a:r>
+          </a:p>
+          <a:p>
+            <a:pPr>
+              <a:spcAft>
+                <a:spcPts val="600"/>
+              </a:spcAft>
+            </a:pPr>
+            <a:r>
+              <a:rPr sz="2400" b="0" i="1">
+                <a:solidFill>
+                  <a:srgbClr val="222B22"/>
+                </a:solidFill>
+                <a:latin typeface="Cambria"/>
+              </a:rPr>
+              <a:t>the Lord make his face to shine upon you and be gracious to you;</a:t>
+            </a:r>
+          </a:p>
+          <a:p>
+            <a:pPr>
+              <a:spcAft>
+                <a:spcPts val="600"/>
+              </a:spcAft>
+            </a:pPr>
+            <a:r>
+              <a:rPr sz="2400" b="0" i="1">
+                <a:solidFill>
+                  <a:srgbClr val="222B22"/>
+                </a:solidFill>
+                <a:latin typeface="Cambria"/>
+              </a:rPr>
+              <a:t>the Lord lift up his countenance upon you and give you peace.”</a:t>
             </a:r>
           </a:p>
         </p:txBody>
@@ -7597,7 +7547,7 @@
           <a:p>
             <a:pPr algn="r"/>
             <a:r>
-              <a:t>261</a:t>
+              <a:t>260</a:t>
             </a:r>
             <a:endParaRPr sz="1000" b="1">
               <a:solidFill>
@@ -7696,7 +7646,7 @@
                 </a:solidFill>
                 <a:latin typeface="Cambria"/>
               </a:rPr>
-              <a:t>Final Reflection Circle</a:t>
+              <a:t>Family Commissionings</a:t>
             </a:r>
           </a:p>
         </p:txBody>
@@ -7723,11 +7673,11 @@
           <a:p>
             <a:pPr marL="274320" indent="-274320">
               <a:spcAft>
-                <a:spcPts val="900"/>
+                <a:spcPts val="750"/>
               </a:spcAft>
             </a:pPr>
             <a:r>
-              <a:rPr sz="2800" b="1" i="0">
+              <a:rPr sz="2400" b="1" i="0">
                 <a:solidFill>
                   <a:srgbClr val="97BC62"/>
                 </a:solidFill>
@@ -7736,73 +7686,123 @@
               <a:t>•  </a:t>
             </a:r>
             <a:r>
-              <a:rPr sz="2800" b="0" i="0">
+              <a:rPr sz="2400" b="0" i="0">
                 <a:solidFill>
                   <a:srgbClr val="222B22"/>
                 </a:solidFill>
                 <a:latin typeface="Calibri"/>
               </a:rPr>
-              <a:t>Around the circle, each person: one specific takeaway from Getting Started, and one specific next commitment — about thirty seconds each</a:t>
-            </a:r>
-          </a:p>
-          <a:p>
-            <a:pPr marL="685800" indent="-274320">
+              <a:t>Each family in turn — parent and teen stand in the center; the rest of the family stands behind them in support</a:t>
+            </a:r>
+          </a:p>
+          <a:p>
+            <a:pPr marL="342900" indent="-342900">
               <a:spcAft>
-                <a:spcPts val="700"/>
+                <a:spcPts val="750"/>
               </a:spcAft>
             </a:pPr>
             <a:r>
-              <a:rPr sz="2000" b="1" i="0">
+              <a:rPr sz="2400" b="1" i="0">
                 <a:solidFill>
                   <a:srgbClr val="97BC62"/>
                 </a:solidFill>
                 <a:latin typeface="Calibri"/>
               </a:rPr>
-              <a:t>–  </a:t>
-            </a:r>
-            <a:r>
-              <a:rPr sz="2000" b="0" i="1">
+              <a:t>1   </a:t>
+            </a:r>
+            <a:r>
+              <a:rPr sz="2400" b="0" i="0">
                 <a:solidFill>
                   <a:srgbClr val="222B22"/>
                 </a:solidFill>
                 <a:latin typeface="Calibri"/>
               </a:rPr>
-              <a:t>The takeaway can be small — “I learned that I can name a doubt without losing my faith.” “I learned that my dad sees me.”</a:t>
-            </a:r>
-          </a:p>
-          <a:p>
-            <a:pPr marL="685800" indent="-274320">
+              <a:t>Brief framing — “We have walked with [name] through Getting Started; we have seen _____.”</a:t>
+            </a:r>
+          </a:p>
+          <a:p>
+            <a:pPr marL="342900" indent="-342900">
               <a:spcAft>
-                <a:spcPts val="700"/>
+                <a:spcPts val="750"/>
               </a:spcAft>
             </a:pPr>
             <a:r>
-              <a:rPr sz="2000" b="1" i="0">
+              <a:rPr sz="2400" b="1" i="0">
                 <a:solidFill>
                   <a:srgbClr val="97BC62"/>
                 </a:solidFill>
                 <a:latin typeface="Calibri"/>
               </a:rPr>
-              <a:t>–  </a:t>
-            </a:r>
-            <a:r>
-              <a:rPr sz="2000" b="0" i="1">
+              <a:t>2   </a:t>
+            </a:r>
+            <a:r>
+              <a:rPr sz="2400" b="0" i="0">
                 <a:solidFill>
                   <a:srgbClr val="222B22"/>
                 </a:solidFill>
                 <a:latin typeface="Calibri"/>
               </a:rPr>
-              <a:t>The commitment can be small too — “I will keep the morning question.” “I will tell my mom one true thing this week.”</a:t>
+              <a:t>Teen blesses parent first — the three sentences</a:t>
+            </a:r>
+          </a:p>
+          <a:p>
+            <a:pPr marL="342900" indent="-342900">
+              <a:spcAft>
+                <a:spcPts val="750"/>
+              </a:spcAft>
+            </a:pPr>
+            <a:r>
+              <a:rPr sz="2400" b="1" i="0">
+                <a:solidFill>
+                  <a:srgbClr val="97BC62"/>
+                </a:solidFill>
+                <a:latin typeface="Calibri"/>
+              </a:rPr>
+              <a:t>3   </a:t>
+            </a:r>
+            <a:r>
+              <a:rPr sz="2400" b="0" i="0">
+                <a:solidFill>
+                  <a:srgbClr val="222B22"/>
+                </a:solidFill>
+                <a:latin typeface="Calibri"/>
+              </a:rPr>
+              <a:t>Parent blesses teen — the three sentences</a:t>
+            </a:r>
+          </a:p>
+          <a:p>
+            <a:pPr marL="342900" indent="-342900">
+              <a:spcAft>
+                <a:spcPts val="750"/>
+              </a:spcAft>
+            </a:pPr>
+            <a:r>
+              <a:rPr sz="2400" b="1" i="0">
+                <a:solidFill>
+                  <a:srgbClr val="97BC62"/>
+                </a:solidFill>
+                <a:latin typeface="Calibri"/>
+              </a:rPr>
+              <a:t>4   </a:t>
+            </a:r>
+            <a:r>
+              <a:rPr sz="2400" b="0" i="0">
+                <a:solidFill>
+                  <a:srgbClr val="222B22"/>
+                </a:solidFill>
+                <a:latin typeface="Calibri"/>
+              </a:rPr>
+              <a:t>“Family of [last name], the community now blesses you.” The whole room speaks the Aaronic blessing aloud together, slowly.</a:t>
             </a:r>
           </a:p>
           <a:p>
             <a:pPr marL="274320" indent="-274320">
               <a:spcAft>
-                <a:spcPts val="900"/>
+                <a:spcPts val="750"/>
               </a:spcAft>
             </a:pPr>
             <a:r>
-              <a:rPr sz="2800" b="1" i="0">
+              <a:rPr sz="2400" b="1" i="0">
                 <a:solidFill>
                   <a:srgbClr val="97BC62"/>
                 </a:solidFill>
@@ -7811,13 +7811,13 @@
               <a:t>•  </a:t>
             </a:r>
             <a:r>
-              <a:rPr sz="2800" b="0" i="0">
+              <a:rPr sz="2400" b="0" i="0">
                 <a:solidFill>
                   <a:srgbClr val="222B22"/>
                 </a:solidFill>
                 <a:latin typeface="Calibri"/>
               </a:rPr>
-              <a:t>You can pass. Visiting family can pass — or share if you want to. The leadsanions go first; a parent opens for the families.</a:t>
+              <a:t>If you freeze — take your time, or ask the other person to read your worksheet for you. If you cry, that is fine. The room can wait.</a:t>
             </a:r>
           </a:p>
         </p:txBody>
@@ -7844,7 +7844,7 @@
           <a:p>
             <a:pPr algn="r"/>
             <a:r>
-              <a:t>262</a:t>
+              <a:t>261</a:t>
             </a:r>
             <a:endParaRPr sz="1000" b="1">
               <a:solidFill>
@@ -7943,7 +7943,7 @@
                 </a:solidFill>
                 <a:latin typeface="Cambria"/>
               </a:rPr>
-              <a:t>Rhythm Card and Going Deeper Bridge</a:t>
+              <a:t>Final Reflection Circle</a:t>
             </a:r>
           </a:p>
         </p:txBody>
@@ -7968,88 +7968,13 @@
           <a:bodyPr wrap="square" lIns="91440" tIns="91440" rIns="91440" bIns="91440"/>
           <a:lstStyle/>
           <a:p>
-            <a:pPr marL="342900" indent="-342900">
-              <a:spcAft>
-                <a:spcPts val="900"/>
-              </a:spcAft>
-            </a:pPr>
-            <a:r>
-              <a:rPr sz="2400" b="1" i="0">
-                <a:solidFill>
-                  <a:srgbClr val="97BC62"/>
-                </a:solidFill>
-                <a:latin typeface="Calibri"/>
-              </a:rPr>
-              <a:t>1   </a:t>
-            </a:r>
-            <a:r>
-              <a:rPr sz="2400" b="0" i="0">
-                <a:solidFill>
-                  <a:srgbClr val="222B22"/>
-                </a:solidFill>
-                <a:latin typeface="Calibri"/>
-              </a:rPr>
-              <a:t>The Daily / Weekly / Monthly Rhythm Card — daily: the morning question and an evening journal note; weekly: one person who knows what you are working on; monthly: a clearing time. It is your card, in your handwriting.</a:t>
-            </a:r>
-          </a:p>
-          <a:p>
-            <a:pPr marL="342900" indent="-342900">
-              <a:spcAft>
-                <a:spcPts val="900"/>
-              </a:spcAft>
-            </a:pPr>
-            <a:r>
-              <a:rPr sz="2400" b="1" i="0">
-                <a:solidFill>
-                  <a:srgbClr val="97BC62"/>
-                </a:solidFill>
-                <a:latin typeface="Calibri"/>
-              </a:rPr>
-              <a:t>2   </a:t>
-            </a:r>
-            <a:r>
-              <a:rPr sz="2400" b="0" i="0">
-                <a:solidFill>
-                  <a:srgbClr val="222B22"/>
-                </a:solidFill>
-                <a:latin typeface="Calibri"/>
-              </a:rPr>
-              <a:t>The Going Deeper bridge — twelve Wednesdays. Decide on your own time. Tonight is not a recruiting pitch.</a:t>
-            </a:r>
-          </a:p>
-          <a:p>
-            <a:pPr marL="342900" indent="-342900">
-              <a:spcAft>
-                <a:spcPts val="900"/>
-              </a:spcAft>
-            </a:pPr>
-            <a:r>
-              <a:rPr sz="2400" b="1" i="0">
-                <a:solidFill>
-                  <a:srgbClr val="97BC62"/>
-                </a:solidFill>
-                <a:latin typeface="Calibri"/>
-              </a:rPr>
-              <a:t>3   </a:t>
-            </a:r>
-            <a:r>
-              <a:rPr sz="2400" b="0" i="0">
-                <a:solidFill>
-                  <a:srgbClr val="222B22"/>
-                </a:solidFill>
-                <a:latin typeface="Calibri"/>
-              </a:rPr>
-              <a:t>The Post-Series Survey — the bin at the door tonight, or email it this week. The next group of families benefits from your honesty.</a:t>
-            </a:r>
-          </a:p>
-          <a:p>
             <a:pPr marL="274320" indent="-274320">
               <a:spcAft>
                 <a:spcPts val="900"/>
               </a:spcAft>
             </a:pPr>
             <a:r>
-              <a:rPr sz="2400" b="1" i="0">
+              <a:rPr sz="2800" b="1" i="0">
                 <a:solidFill>
                   <a:srgbClr val="97BC62"/>
                 </a:solidFill>
@@ -8058,13 +7983,88 @@
               <a:t>•  </a:t>
             </a:r>
             <a:r>
-              <a:rPr sz="2400" b="0" i="0">
+              <a:rPr sz="2800" b="0" i="0">
                 <a:solidFill>
                   <a:srgbClr val="222B22"/>
                 </a:solidFill>
                 <a:latin typeface="Calibri"/>
               </a:rPr>
-              <a:t>If a daily practice slips — do not start over from scratch; start the next day. Streaks are not the point. Returning is the point.</a:t>
+              <a:t>Around the circle, each person: one specific takeaway from Getting Started, and one specific next commitment — about thirty seconds each</a:t>
+            </a:r>
+          </a:p>
+          <a:p>
+            <a:pPr marL="685800" indent="-274320">
+              <a:spcAft>
+                <a:spcPts val="700"/>
+              </a:spcAft>
+            </a:pPr>
+            <a:r>
+              <a:rPr sz="2000" b="1" i="0">
+                <a:solidFill>
+                  <a:srgbClr val="97BC62"/>
+                </a:solidFill>
+                <a:latin typeface="Calibri"/>
+              </a:rPr>
+              <a:t>–  </a:t>
+            </a:r>
+            <a:r>
+              <a:rPr sz="2000" b="0" i="1">
+                <a:solidFill>
+                  <a:srgbClr val="222B22"/>
+                </a:solidFill>
+                <a:latin typeface="Calibri"/>
+              </a:rPr>
+              <a:t>The takeaway can be small — “I learned that I can name a doubt without losing my faith.” “I learned that my dad sees me.”</a:t>
+            </a:r>
+          </a:p>
+          <a:p>
+            <a:pPr marL="685800" indent="-274320">
+              <a:spcAft>
+                <a:spcPts val="700"/>
+              </a:spcAft>
+            </a:pPr>
+            <a:r>
+              <a:rPr sz="2000" b="1" i="0">
+                <a:solidFill>
+                  <a:srgbClr val="97BC62"/>
+                </a:solidFill>
+                <a:latin typeface="Calibri"/>
+              </a:rPr>
+              <a:t>–  </a:t>
+            </a:r>
+            <a:r>
+              <a:rPr sz="2000" b="0" i="1">
+                <a:solidFill>
+                  <a:srgbClr val="222B22"/>
+                </a:solidFill>
+                <a:latin typeface="Calibri"/>
+              </a:rPr>
+              <a:t>The commitment can be small too — “I will keep the morning question.” “I will tell my mom one true thing this week.”</a:t>
+            </a:r>
+          </a:p>
+          <a:p>
+            <a:pPr marL="274320" indent="-274320">
+              <a:spcAft>
+                <a:spcPts val="900"/>
+              </a:spcAft>
+            </a:pPr>
+            <a:r>
+              <a:rPr sz="2800" b="1" i="0">
+                <a:solidFill>
+                  <a:srgbClr val="97BC62"/>
+                </a:solidFill>
+                <a:latin typeface="Calibri"/>
+              </a:rPr>
+              <a:t>•  </a:t>
+            </a:r>
+            <a:r>
+              <a:rPr sz="2800" b="0" i="0">
+                <a:solidFill>
+                  <a:srgbClr val="222B22"/>
+                </a:solidFill>
+                <a:latin typeface="Calibri"/>
+              </a:rPr>
+              <a:t>You can pass. Visiting family can pass — or share if you want to. The leadsanions go first; a parent opens for the families.</a:t>
             </a:r>
           </a:p>
         </p:txBody>
@@ -8091,7 +8091,7 @@
           <a:p>
             <a:pPr algn="r"/>
             <a:r>
-              <a:t>263</a:t>
+              <a:t>262</a:t>
             </a:r>
             <a:endParaRPr sz="1000" b="1">
               <a:solidFill>

--- a/_implementation-notes/evening-series/FotH Evening Session 21 Slides DRAFT v1.pptx
+++ b/_implementation-notes/evening-series/FotH Evening Session 21 Slides DRAFT v1.pptx
@@ -6214,7 +6214,7 @@
           <p:nvPr/>
         </p:nvPicPr>
         <p:blipFill>
-          <a:blip r:embed="rId4"/>
+          <a:blip r:embed="rId5"/>
           <a:stretch>
             <a:fillRect/>
           </a:stretch>

--- a/_implementation-notes/evening-series/FotH Evening Session 21 Slides DRAFT v1.pptx
+++ b/_implementation-notes/evening-series/FotH Evening Session 21 Slides DRAFT v1.pptx
@@ -5047,7 +5047,7 @@
           <a:p>
             <a:pPr algn="r"/>
             <a:r>
-              <a:t>263</a:t>
+              <a:t>304</a:t>
             </a:r>
             <a:endParaRPr sz="1000" b="1">
               <a:solidFill>
@@ -5239,7 +5239,7 @@
           <a:p>
             <a:pPr algn="r"/>
             <a:r>
-              <a:t>264</a:t>
+              <a:t>305</a:t>
             </a:r>
             <a:endParaRPr sz="1000" b="1">
               <a:solidFill>
@@ -5431,7 +5431,7 @@
           <a:p>
             <a:pPr algn="r"/>
             <a:r>
-              <a:t>264a</a:t>
+              <a:t>306</a:t>
             </a:r>
             <a:endParaRPr sz="1000" b="1">
               <a:solidFill>
@@ -5728,7 +5728,7 @@
           <a:p>
             <a:pPr algn="r"/>
             <a:r>
-              <a:t>265</a:t>
+              <a:t>307</a:t>
             </a:r>
             <a:endParaRPr sz="1000" b="1">
               <a:solidFill>
@@ -6013,7 +6013,7 @@
           <a:p>
             <a:pPr algn="r"/>
             <a:r>
-              <a:t>256</a:t>
+              <a:t>296</a:t>
             </a:r>
             <a:endParaRPr sz="1000" b="1">
               <a:solidFill>
@@ -6194,7 +6194,7 @@
           <a:p>
             <a:pPr algn="r"/>
             <a:r>
-              <a:t>256a</a:t>
+              <a:t>297</a:t>
             </a:r>
             <a:endParaRPr sz="1000" b="1">
               <a:solidFill>
@@ -6583,7 +6583,7 @@
           <a:p>
             <a:pPr algn="r"/>
             <a:r>
-              <a:t>257</a:t>
+              <a:t>298</a:t>
             </a:r>
             <a:endParaRPr sz="1000" b="1">
               <a:solidFill>
@@ -6891,7 +6891,7 @@
           <a:p>
             <a:pPr algn="r"/>
             <a:r>
-              <a:t>258</a:t>
+              <a:t>299</a:t>
             </a:r>
             <a:endParaRPr sz="1000" b="1">
               <a:solidFill>
@@ -7188,7 +7188,7 @@
           <a:p>
             <a:pPr algn="r"/>
             <a:r>
-              <a:t>259</a:t>
+              <a:t>300</a:t>
             </a:r>
             <a:endParaRPr sz="1000" b="1">
               <a:solidFill>
@@ -7547,7 +7547,7 @@
           <a:p>
             <a:pPr algn="r"/>
             <a:r>
-              <a:t>260</a:t>
+              <a:t>301</a:t>
             </a:r>
             <a:endParaRPr sz="1000" b="1">
               <a:solidFill>
@@ -7844,7 +7844,7 @@
           <a:p>
             <a:pPr algn="r"/>
             <a:r>
-              <a:t>261</a:t>
+              <a:t>302</a:t>
             </a:r>
             <a:endParaRPr sz="1000" b="1">
               <a:solidFill>
@@ -8091,7 +8091,7 @@
           <a:p>
             <a:pPr algn="r"/>
             <a:r>
-              <a:t>262</a:t>
+              <a:t>303</a:t>
             </a:r>
             <a:endParaRPr sz="1000" b="1">
               <a:solidFill>

--- a/_implementation-notes/evening-series/FotH Evening Session 21 Slides DRAFT v1.pptx
+++ b/_implementation-notes/evening-series/FotH Evening Session 21 Slides DRAFT v1.pptx
@@ -6214,7 +6214,7 @@
           <p:nvPr/>
         </p:nvPicPr>
         <p:blipFill>
-          <a:blip r:embed="rId5"/>
+          <a:blip r:embed="rId6"/>
           <a:stretch>
             <a:fillRect/>
           </a:stretch>

--- a/_implementation-notes/evening-series/FotH Evening Session 21 Slides DRAFT v1.pptx
+++ b/_implementation-notes/evening-series/FotH Evening Session 21 Slides DRAFT v1.pptx
@@ -1234,7 +1234,7 @@
           <a:p>
             <a:r>
               <a:rPr lang="en-US" sz="1200"/>
-              <a:t>SUB: The demo blessing must be the speakers' own — real words about a real person they know. A covering leader never performs a borrowed blessing; if you are new to this room, demo with a Companion you genuinely know, or let two leadsanions carry the demo.</a:t>
+              <a:t>SUB: The demo blessing must be the speakers' own — real words about a real person they know. A covering leader never performs a borrowed blessing; if you are new to this room, demo with a Companion you genuinely know, or let two Lead Companions carry the demo.</a:t>
             </a:r>
           </a:p>
         </p:txBody>
@@ -1459,7 +1459,7 @@
           <a:p>
             <a:r>
               <a:rPr lang="en-US" sz="1200"/>
-              <a:t>2. leadsanions go first to model; then the arranged parent opens for the families (Run Card) — never a cold call on a teen; pass-anytime holds; visitors may pass or share.</a:t>
+              <a:t>2. Lead Companions go first to model; then the arranged parent opens for the families (Run Card) — never a cold call on a teen; pass-anytime holds; visitors may pass or share.</a:t>
             </a:r>
           </a:p>
           <a:p>
@@ -8064,7 +8064,7 @@
                 </a:solidFill>
                 <a:latin typeface="Calibri"/>
               </a:rPr>
-              <a:t>You can pass. Visiting family can pass — or share if you want to. The leadsanions go first; a parent opens for the families.</a:t>
+              <a:t>You can pass. Visiting family can pass — or share if you want to. The Lead Companions go first; a parent opens for the families.</a:t>
             </a:r>
           </a:p>
         </p:txBody>

--- a/_implementation-notes/evening-series/FotH Evening Session 21 Slides DRAFT v1.pptx
+++ b/_implementation-notes/evening-series/FotH Evening Session 21 Slides DRAFT v1.pptx
@@ -5047,7 +5047,7 @@
           <a:p>
             <a:pPr algn="r"/>
             <a:r>
-              <a:t>304</a:t>
+              <a:t>305</a:t>
             </a:r>
             <a:endParaRPr sz="1000" b="1">
               <a:solidFill>
@@ -5239,7 +5239,7 @@
           <a:p>
             <a:pPr algn="r"/>
             <a:r>
-              <a:t>305</a:t>
+              <a:t>306</a:t>
             </a:r>
             <a:endParaRPr sz="1000" b="1">
               <a:solidFill>
@@ -5431,7 +5431,7 @@
           <a:p>
             <a:pPr algn="r"/>
             <a:r>
-              <a:t>306</a:t>
+              <a:t>307</a:t>
             </a:r>
             <a:endParaRPr sz="1000" b="1">
               <a:solidFill>
@@ -5728,7 +5728,7 @@
           <a:p>
             <a:pPr algn="r"/>
             <a:r>
-              <a:t>307</a:t>
+              <a:t>308</a:t>
             </a:r>
             <a:endParaRPr sz="1000" b="1">
               <a:solidFill>
@@ -6013,7 +6013,7 @@
           <a:p>
             <a:pPr algn="r"/>
             <a:r>
-              <a:t>296</a:t>
+              <a:t>297</a:t>
             </a:r>
             <a:endParaRPr sz="1000" b="1">
               <a:solidFill>
@@ -6194,7 +6194,7 @@
           <a:p>
             <a:pPr algn="r"/>
             <a:r>
-              <a:t>297</a:t>
+              <a:t>298</a:t>
             </a:r>
             <a:endParaRPr sz="1000" b="1">
               <a:solidFill>
@@ -6583,7 +6583,7 @@
           <a:p>
             <a:pPr algn="r"/>
             <a:r>
-              <a:t>298</a:t>
+              <a:t>299</a:t>
             </a:r>
             <a:endParaRPr sz="1000" b="1">
               <a:solidFill>
@@ -6891,7 +6891,7 @@
           <a:p>
             <a:pPr algn="r"/>
             <a:r>
-              <a:t>299</a:t>
+              <a:t>300</a:t>
             </a:r>
             <a:endParaRPr sz="1000" b="1">
               <a:solidFill>
@@ -7188,7 +7188,7 @@
           <a:p>
             <a:pPr algn="r"/>
             <a:r>
-              <a:t>300</a:t>
+              <a:t>301</a:t>
             </a:r>
             <a:endParaRPr sz="1000" b="1">
               <a:solidFill>
@@ -7547,7 +7547,7 @@
           <a:p>
             <a:pPr algn="r"/>
             <a:r>
-              <a:t>301</a:t>
+              <a:t>302</a:t>
             </a:r>
             <a:endParaRPr sz="1000" b="1">
               <a:solidFill>
@@ -7844,7 +7844,7 @@
           <a:p>
             <a:pPr algn="r"/>
             <a:r>
-              <a:t>302</a:t>
+              <a:t>303</a:t>
             </a:r>
             <a:endParaRPr sz="1000" b="1">
               <a:solidFill>
@@ -8091,7 +8091,7 @@
           <a:p>
             <a:pPr algn="r"/>
             <a:r>
-              <a:t>303</a:t>
+              <a:t>304</a:t>
             </a:r>
             <a:endParaRPr sz="1000" b="1">
               <a:solidFill>

--- a/_implementation-notes/evening-series/FotH Evening Session 21 Slides DRAFT v1.pptx
+++ b/_implementation-notes/evening-series/FotH Evening Session 21 Slides DRAFT v1.pptx
@@ -5047,7 +5047,7 @@
           <a:p>
             <a:pPr algn="r"/>
             <a:r>
-              <a:t>305</a:t>
+              <a:t>306</a:t>
             </a:r>
             <a:endParaRPr sz="1000" b="1">
               <a:solidFill>
@@ -5239,7 +5239,7 @@
           <a:p>
             <a:pPr algn="r"/>
             <a:r>
-              <a:t>306</a:t>
+              <a:t>307</a:t>
             </a:r>
             <a:endParaRPr sz="1000" b="1">
               <a:solidFill>
@@ -5431,7 +5431,7 @@
           <a:p>
             <a:pPr algn="r"/>
             <a:r>
-              <a:t>307</a:t>
+              <a:t>308</a:t>
             </a:r>
             <a:endParaRPr sz="1000" b="1">
               <a:solidFill>
@@ -5728,7 +5728,7 @@
           <a:p>
             <a:pPr algn="r"/>
             <a:r>
-              <a:t>308</a:t>
+              <a:t>309</a:t>
             </a:r>
             <a:endParaRPr sz="1000" b="1">
               <a:solidFill>
@@ -6013,7 +6013,7 @@
           <a:p>
             <a:pPr algn="r"/>
             <a:r>
-              <a:t>297</a:t>
+              <a:t>298</a:t>
             </a:r>
             <a:endParaRPr sz="1000" b="1">
               <a:solidFill>
@@ -6194,7 +6194,7 @@
           <a:p>
             <a:pPr algn="r"/>
             <a:r>
-              <a:t>298</a:t>
+              <a:t>299</a:t>
             </a:r>
             <a:endParaRPr sz="1000" b="1">
               <a:solidFill>
@@ -6583,7 +6583,7 @@
           <a:p>
             <a:pPr algn="r"/>
             <a:r>
-              <a:t>299</a:t>
+              <a:t>300</a:t>
             </a:r>
             <a:endParaRPr sz="1000" b="1">
               <a:solidFill>
@@ -6891,7 +6891,7 @@
           <a:p>
             <a:pPr algn="r"/>
             <a:r>
-              <a:t>300</a:t>
+              <a:t>301</a:t>
             </a:r>
             <a:endParaRPr sz="1000" b="1">
               <a:solidFill>
@@ -7188,7 +7188,7 @@
           <a:p>
             <a:pPr algn="r"/>
             <a:r>
-              <a:t>301</a:t>
+              <a:t>302</a:t>
             </a:r>
             <a:endParaRPr sz="1000" b="1">
               <a:solidFill>
@@ -7547,7 +7547,7 @@
           <a:p>
             <a:pPr algn="r"/>
             <a:r>
-              <a:t>302</a:t>
+              <a:t>303</a:t>
             </a:r>
             <a:endParaRPr sz="1000" b="1">
               <a:solidFill>
@@ -7844,7 +7844,7 @@
           <a:p>
             <a:pPr algn="r"/>
             <a:r>
-              <a:t>303</a:t>
+              <a:t>304</a:t>
             </a:r>
             <a:endParaRPr sz="1000" b="1">
               <a:solidFill>
@@ -8091,7 +8091,7 @@
           <a:p>
             <a:pPr algn="r"/>
             <a:r>
-              <a:t>304</a:t>
+              <a:t>305</a:t>
             </a:r>
             <a:endParaRPr sz="1000" b="1">
               <a:solidFill>

--- a/_implementation-notes/evening-series/FotH Evening Session 21 Slides DRAFT v1.pptx
+++ b/_implementation-notes/evening-series/FotH Evening Session 21 Slides DRAFT v1.pptx
@@ -783,7 +783,7 @@
           <a:lstStyle/>
           <a:p>
             <a:r>
-              <a:t>S21 · WELCOME · LEAD: CONTAINER HOLDER · GROUNDING — every session opens on this map</a:t>
+              <a:t>E16 · WELCOME · LEAD: CONTAINER HOLDER · GROUNDING — every session opens on this map</a:t>
             </a:r>
           </a:p>
           <a:p>
@@ -793,7 +793,7 @@
           </a:p>
           <a:p>
             <a:r>
-              <a:t>1. Locate tonight on the map, plainly: Session 21 carries the whole map into the sending — all four Connects, integrated. Each connection makes the next one real (Matt. 22:37–40).</a:t>
+              <a:t>1. Locate tonight on the map, plainly: Evening 16 carries the whole map into the sending — all four Connects, integrated. Each connection makes the next one real (Matt. 22:37–40).</a:t>
             </a:r>
           </a:p>
           <a:p>
@@ -854,7 +854,7 @@
           <a:lstStyle/>
           <a:p>
             <a:r>
-              <a:t>S21 · COMMISSIONING · LEAD: CONTENT PRESENTER</a:t>
+              <a:t>E16 · COMMISSIONING · LEAD: CONTENT PRESENTER</a:t>
             </a:r>
           </a:p>
           <a:p>
@@ -925,7 +925,7 @@
           <a:lstStyle/>
           <a:p>
             <a:r>
-              <a:t>S21 · COMMISSIONING · LEAD: CONTENT PRESENTER</a:t>
+              <a:t>E16 · COMMISSIONING · LEAD: CONTENT PRESENTER</a:t>
             </a:r>
           </a:p>
           <a:p>
@@ -991,13 +991,11 @@
           <a:lstStyle/>
           <a:p>
             <a:r>
-              <a:rPr lang="en-US" sz="1200"/>
-              <a:t>S21 · pre-session · DIVIDER</a:t>
-            </a:r>
-          </a:p>
-          <a:p>
-            <a:r>
-              <a:rPr lang="en-US" sz="1200"/>
+              <a:t>E16 · pre-session · DIVIDER</a:t>
+            </a:r>
+          </a:p>
+          <a:p>
+            <a:r>
               <a:t>On screen through dinner and as the circle forms. Greet at the door — the slide holds the room. TONIGHT MAY RUN LONG: the school version is 120 minutes (food 4:00, session 4:15–6:15); the evening shape · standard 7:00–8:30 or a special longer evening · is decided at the lab. Visiting family without the twenty weeks of context get a warm brief at the door and a familiar Companion beside them. Survey return bin visible at the door.</a:t>
             </a:r>
           </a:p>
@@ -1044,37 +1042,31 @@
           <a:lstStyle/>
           <a:p>
             <a:r>
-              <a:rPr lang="en-US" sz="1200"/>
-              <a:t>S21 · 7:00–8:30 · LEAD: BOTH LEADERS CIRCLE</a:t>
-            </a:r>
-          </a:p>
-          <a:p>
-            <a:r>
-              <a:rPr lang="en-US" sz="1200"/>
+              <a:t>E16 · 7:00–8:30 · LEAD: BOTH LEADERS CIRCLE</a:t>
+            </a:r>
+          </a:p>
+          <a:p>
+            <a:r>
               <a:t>BEATS:</a:t>
             </a:r>
           </a:p>
           <a:p>
             <a:r>
-              <a:rPr lang="en-US" sz="1200"/>
               <a:t>1. Name the night: the Family Commissioning — a 120-minute night, extended on purpose; everything serves the hour in the middle.</a:t>
             </a:r>
           </a:p>
           <a:p>
             <a:r>
-              <a:rPr lang="en-US" sz="1200"/>
               <a:t>2. Shape: integration teaching, blessing rehearsal, reading and prayer, the family commissionings (~55 min, the heart), reflection circle, Rhythm Card and Going Deeper bridge, feedback (droppable today), final blessing.</a:t>
             </a:r>
           </a:p>
           <a:p>
             <a:r>
-              <a:rPr lang="en-US" sz="1200"/>
               <a:t>3. Hold the schedule — the time-keeper has real authority; 120 minutes must not become 150; the closing matters more than running long.</a:t>
             </a:r>
           </a:p>
           <a:p>
             <a:r>
-              <a:rPr lang="en-US" sz="1200"/>
               <a:t>GUARD: Every absent-parent situation was pre-planned with the family — stand-in, cohort standing, or community blessing only. Decided in advance, never improvised on the night.</a:t>
             </a:r>
           </a:p>
@@ -1121,7 +1113,7 @@
           <a:lstStyle/>
           <a:p>
             <a:r>
-              <a:t>S21 · 7:00–7:08 · LEAD: CONTAINER HOLDER CIRCLE</a:t>
+              <a:t>E16 · 7:00–7:08 · LEAD: CONTAINER HOLDER CIRCLE</a:t>
             </a:r>
           </a:p>
           <a:p>
@@ -1197,43 +1189,36 @@
           <a:lstStyle/>
           <a:p>
             <a:r>
-              <a:rPr lang="en-US" sz="1200"/>
-              <a:t>S21 · 7:25–7:31 · LEAD: CONTENT PRESENTER CIRCLE</a:t>
-            </a:r>
-          </a:p>
-          <a:p>
-            <a:r>
-              <a:rPr lang="en-US" sz="1200"/>
+              <a:t>E16 · 7:25–7:31 · LEAD: CONTENT PRESENTER CIRCLE</a:t>
+            </a:r>
+          </a:p>
+          <a:p>
+            <a:r>
               <a:t>BEATS:</a:t>
             </a:r>
           </a:p>
           <a:p>
             <a:r>
-              <a:rPr lang="en-US" sz="1200"/>
               <a:t>1. Walk the three-sentence form aloud: what I have specifically seen God doing in you; what I bless in you today; what I commit to you moving forward.</a:t>
             </a:r>
           </a:p>
           <a:p>
             <a:r>
-              <a:rPr lang="en-US" sz="1200"/>
               <a:t>2. Two Companions demo a real blessing — brief, specific, honest, never theatrical; the parents calibrate against this demo.</a:t>
             </a:r>
           </a:p>
           <a:p>
             <a:r>
-              <a:rPr lang="en-US" sz="1200"/>
               <a:t>3. Brief Q&amp;A, one or two questions; do not over-explain — the worksheet and the demo already taught it. Trust the room.</a:t>
             </a:r>
           </a:p>
           <a:p>
             <a:r>
-              <a:rPr lang="en-US" sz="1200"/>
               <a:t>CUES: Blessing form = one specific witnessed sentence per line, not a speech — the brevity is the discipline; say it twice before the commissionings begin.</a:t>
             </a:r>
           </a:p>
           <a:p>
             <a:r>
-              <a:rPr lang="en-US" sz="1200"/>
               <a:t>SUB: The demo blessing must be the speakers' own — real words about a real person they know. A covering leader never performs a borrowed blessing; if you are new to this room, demo with a Companion you genuinely know, or let two Lead Companions carry the demo.</a:t>
             </a:r>
           </a:p>
@@ -1280,31 +1265,26 @@
           <a:lstStyle/>
           <a:p>
             <a:r>
-              <a:rPr lang="en-US" sz="1200"/>
-              <a:t>S21 · 7:31–7:37 · LEAD: CONTENT PRESENTER CIRCLE</a:t>
-            </a:r>
-          </a:p>
-          <a:p>
-            <a:r>
-              <a:rPr lang="en-US" sz="1200"/>
+              <a:t>E16 · 7:31–7:37 · LEAD: CONTENT PRESENTER CIRCLE</a:t>
+            </a:r>
+          </a:p>
+          <a:p>
+            <a:r>
               <a:t>BEATS:</a:t>
             </a:r>
           </a:p>
           <a:p>
             <a:r>
-              <a:rPr lang="en-US" sz="1200"/>
               <a:t>1. Read Numbers 6:24–26, then Philippians 1:6, from the physical Bible.</a:t>
             </a:r>
           </a:p>
           <a:p>
             <a:r>
-              <a:rPr lang="en-US" sz="1200"/>
               <a:t>2. Two framings, 90 seconds total: the Aaronic blessing is covenantal — the words God specifically authorized, not improvisation; and Getting Started is part of the beginning — the work is His to finish.</a:t>
             </a:r>
           </a:p>
           <a:p>
             <a:r>
-              <a:rPr lang="en-US" sz="1200"/>
               <a:t>3. Pray over the commissioning to come, then move — the families are ready.</a:t>
             </a:r>
           </a:p>
@@ -1351,49 +1331,41 @@
           <a:lstStyle/>
           <a:p>
             <a:r>
-              <a:rPr lang="en-US" sz="1200"/>
-              <a:t>S21 · 7:00–8:30 · LEAD: BOTH LEADERS CIRCLE</a:t>
-            </a:r>
-          </a:p>
-          <a:p>
-            <a:r>
-              <a:rPr lang="en-US" sz="1200"/>
+              <a:t>E16 · 7:00–8:30 · LEAD: BOTH LEADERS CIRCLE</a:t>
+            </a:r>
+          </a:p>
+          <a:p>
+            <a:r>
               <a:t>BEATS:</a:t>
             </a:r>
           </a:p>
           <a:p>
             <a:r>
-              <a:rPr lang="en-US" sz="1200"/>
               <a:t>1. Per family (~5–7 min): call them center, family standing behind; ONE framing sentence per member; teen blesses parent FIRST; parent blesses teen; the room speaks the Aaronic over them; 30 seconds of breath between families.</a:t>
             </a:r>
           </a:p>
           <a:p>
             <a:r>
-              <a:rPr lang="en-US" sz="1200"/>
               <a:t>2. Running long? Compress the framing — never the blessings.</a:t>
             </a:r>
           </a:p>
           <a:p>
             <a:r>
-              <a:rPr lang="en-US" sz="1200"/>
               <a:t>3. A frozen teen: 'Take your time — or your mom can read it for you.' An overwhelmed parent: wait; most recover; if not, name the worksheet's heart with permission.</a:t>
             </a:r>
           </a:p>
           <a:p>
             <a:r>
-              <a:rPr lang="en-US" sz="1200"/>
               <a:t>CUES: Blessing form = one specific witnessed sentence per line, not a speech.</a:t>
             </a:r>
           </a:p>
           <a:p>
             <a:r>
-              <a:rPr lang="en-US" sz="1200"/>
               <a:t>GUARD: Absent-parent plans were pre-decided — stick to them. Real conflict surfacing: stop, step aside with the family, no interpreting in the room; Section 6, backup within the hour.</a:t>
             </a:r>
           </a:p>
           <a:p>
             <a:r>
-              <a:rPr lang="en-US" sz="1200"/>
               <a:t>SUB: The framing must be witnessed truth — speak the team's prepared line per family (Run Card) as theirs; never invent a witness you did not see.</a:t>
             </a:r>
           </a:p>
@@ -1440,31 +1412,26 @@
           <a:lstStyle/>
           <a:p>
             <a:r>
-              <a:rPr lang="en-US" sz="1200"/>
-              <a:t>S21 · 8:07–8:13 · LEAD: CONTENT PRESENTER CIRCLE</a:t>
-            </a:r>
-          </a:p>
-          <a:p>
-            <a:r>
-              <a:rPr lang="en-US" sz="1200"/>
+              <a:t>E16 · 8:07–8:13 · LEAD: CONTENT PRESENTER CIRCLE</a:t>
+            </a:r>
+          </a:p>
+          <a:p>
+            <a:r>
               <a:t>BEATS:</a:t>
             </a:r>
           </a:p>
           <a:p>
             <a:r>
-              <a:rPr lang="en-US" sz="1200"/>
               <a:t>1. Around the circle: one specific takeaway, one specific next commitment — about thirty seconds each, brisk. Small counts: 'I will keep the morning question' is a real commitment.</a:t>
             </a:r>
           </a:p>
           <a:p>
             <a:r>
-              <a:rPr lang="en-US" sz="1200"/>
               <a:t>2. Lead Companions go first to model; then the arranged parent opens for the families (Run Card) — never a cold call on a teen; pass-anytime holds; visitors may pass or share.</a:t>
             </a:r>
           </a:p>
           <a:p>
             <a:r>
-              <a:rPr lang="en-US" sz="1200"/>
               <a:t>3. Receive without commentary — eye contact, slight nod; do not summarize anyone's sentence.</a:t>
             </a:r>
           </a:p>
@@ -1511,25 +1478,21 @@
           <a:lstStyle/>
           <a:p>
             <a:r>
-              <a:rPr lang="en-US" sz="1200"/>
-              <a:t>S21 · 8:13–8:19 · LEAD: CONTENT PRESENTER CIRCLE</a:t>
-            </a:r>
-          </a:p>
-          <a:p>
-            <a:r>
-              <a:rPr lang="en-US" sz="1200"/>
+              <a:t>E16 · 8:13–8:19 · LEAD: CONTENT PRESENTER CIRCLE</a:t>
+            </a:r>
+          </a:p>
+          <a:p>
+            <a:r>
               <a:t>BEATS:</a:t>
             </a:r>
           </a:p>
           <a:p>
             <a:r>
-              <a:rPr lang="en-US" sz="1200"/>
               <a:t>1. Three practical things, warm and brief: the Daily/Weekly/Monthly Rhythm Card (H21.3 is a fresh copy — it is their card, in their handwriting); the Going Deeper bridge (H21.4 — dates, details, registration; decide on your own time); the Post-Series Survey — bin at the door today, or email this week.</a:t>
             </a:r>
           </a:p>
           <a:p>
             <a:r>
-              <a:rPr lang="en-US" sz="1200"/>
               <a:t>2. Today is a sending, not a recruiting pitch — some families will continue, some will not, and both are good. Say it plainly and leave it there.</a:t>
             </a:r>
           </a:p>
@@ -1576,37 +1539,31 @@
           <a:lstStyle/>
           <a:p>
             <a:r>
-              <a:rPr lang="en-US" sz="1200"/>
-              <a:t>S21 · 8:24–8:28 · LEAD: BOTH LEADERS CIRCLE</a:t>
-            </a:r>
-          </a:p>
-          <a:p>
-            <a:r>
-              <a:rPr lang="en-US" sz="1200"/>
+              <a:t>E16 · 8:24–8:28 · LEAD: BOTH LEADERS CIRCLE</a:t>
+            </a:r>
+          </a:p>
+          <a:p>
+            <a:r>
               <a:t>BEATS:</a:t>
             </a:r>
           </a:p>
           <a:p>
             <a:r>
-              <a:rPr lang="en-US" sz="1200"/>
               <a:t>1. Feedback round, standard shape — the leader's three answers, then the room, received undefended. On a commissioning night it may well be dropped: the ceremony is often the something-else the energy needs; dropping it twice running goes to the debrief.</a:t>
             </a:r>
           </a:p>
           <a:p>
             <a:r>
-              <a:rPr lang="en-US" sz="1200"/>
               <a:t>2. Final blessing (6:10): the whole community speaks the Aaronic over the whole community — hands up, together, slowly. Pause; let the silence land.</a:t>
             </a:r>
           </a:p>
           <a:p>
             <a:r>
-              <a:rPr lang="en-US" sz="1200"/>
-              <a:t>3. 'You are sent. Walk gently.' Then announce Week 22 — the commissioning of the Companions; it is their night, and everyone is wanted in the room for it.</a:t>
-            </a:r>
-          </a:p>
-          <a:p>
-            <a:r>
-              <a:rPr lang="en-US" sz="1200"/>
+              <a:t>3. 'You are sent. Walk gently.' Then announce Evening 17 — the commissioning of the Companions; it is their night, and everyone is wanted in the room for it.</a:t>
+            </a:r>
+          </a:p>
+          <a:p>
+            <a:r>
               <a:t>4. After the sending, do not pack up. Stay — some will not leave for an hour; the work after the closing is sometimes the work.</a:t>
             </a:r>
           </a:p>
@@ -5915,7 +5872,7 @@
                 </a:solidFill>
                 <a:latin typeface="Calibri"/>
               </a:rPr>
-              <a:t>SESSION 21</a:t>
+              <a:t>EVENING 16</a:t>
             </a:r>
           </a:p>
           <a:p>
@@ -6149,7 +6106,7 @@
                 </a:solidFill>
                 <a:latin typeface="Calibri"/>
               </a:rPr>
-              <a:t>Session 21 carries the whole map into the sending — </a:t>
+              <a:t>Evening 16 carries the whole map into the sending — </a:t>
             </a:r>
             <a:r>
               <a:rPr sz="1800" b="1">
@@ -6333,7 +6290,7 @@
                 </a:solidFill>
                 <a:latin typeface="Cambria"/>
               </a:rPr>
-              <a:t>Session 21 — Tonight’s Road</a:t>
+              <a:t>Evening 16 — Tonight’s Road</a:t>
             </a:r>
           </a:p>
         </p:txBody>

--- a/_implementation-notes/evening-series/FotH Evening Session 21 Slides DRAFT v1.pptx
+++ b/_implementation-notes/evening-series/FotH Evening Session 21 Slides DRAFT v1.pptx
@@ -5004,7 +5004,7 @@
           <a:p>
             <a:pPr algn="r"/>
             <a:r>
-              <a:t>306</a:t>
+              <a:t>307</a:t>
             </a:r>
             <a:endParaRPr sz="1000" b="1">
               <a:solidFill>
@@ -5196,7 +5196,7 @@
           <a:p>
             <a:pPr algn="r"/>
             <a:r>
-              <a:t>307</a:t>
+              <a:t>308</a:t>
             </a:r>
             <a:endParaRPr sz="1000" b="1">
               <a:solidFill>
@@ -5388,7 +5388,7 @@
           <a:p>
             <a:pPr algn="r"/>
             <a:r>
-              <a:t>308</a:t>
+              <a:t>309</a:t>
             </a:r>
             <a:endParaRPr sz="1000" b="1">
               <a:solidFill>
@@ -5685,7 +5685,7 @@
           <a:p>
             <a:pPr algn="r"/>
             <a:r>
-              <a:t>309</a:t>
+              <a:t>310</a:t>
             </a:r>
             <a:endParaRPr sz="1000" b="1">
               <a:solidFill>
@@ -5970,7 +5970,7 @@
           <a:p>
             <a:pPr algn="r"/>
             <a:r>
-              <a:t>298</a:t>
+              <a:t>299</a:t>
             </a:r>
             <a:endParaRPr sz="1000" b="1">
               <a:solidFill>
@@ -6151,7 +6151,7 @@
           <a:p>
             <a:pPr algn="r"/>
             <a:r>
-              <a:t>299</a:t>
+              <a:t>300</a:t>
             </a:r>
             <a:endParaRPr sz="1000" b="1">
               <a:solidFill>
@@ -6540,7 +6540,7 @@
           <a:p>
             <a:pPr algn="r"/>
             <a:r>
-              <a:t>300</a:t>
+              <a:t>301</a:t>
             </a:r>
             <a:endParaRPr sz="1000" b="1">
               <a:solidFill>
@@ -6848,7 +6848,7 @@
           <a:p>
             <a:pPr algn="r"/>
             <a:r>
-              <a:t>301</a:t>
+              <a:t>302</a:t>
             </a:r>
             <a:endParaRPr sz="1000" b="1">
               <a:solidFill>
@@ -7145,7 +7145,7 @@
           <a:p>
             <a:pPr algn="r"/>
             <a:r>
-              <a:t>302</a:t>
+              <a:t>303</a:t>
             </a:r>
             <a:endParaRPr sz="1000" b="1">
               <a:solidFill>
@@ -7504,7 +7504,7 @@
           <a:p>
             <a:pPr algn="r"/>
             <a:r>
-              <a:t>303</a:t>
+              <a:t>304</a:t>
             </a:r>
             <a:endParaRPr sz="1000" b="1">
               <a:solidFill>
@@ -7801,7 +7801,7 @@
           <a:p>
             <a:pPr algn="r"/>
             <a:r>
-              <a:t>304</a:t>
+              <a:t>305</a:t>
             </a:r>
             <a:endParaRPr sz="1000" b="1">
               <a:solidFill>
@@ -8048,7 +8048,7 @@
           <a:p>
             <a:pPr algn="r"/>
             <a:r>
-              <a:t>305</a:t>
+              <a:t>306</a:t>
             </a:r>
             <a:endParaRPr sz="1000" b="1">
               <a:solidFill>

--- a/_implementation-notes/evening-series/FotH Evening Session 21 Slides DRAFT v1.pptx
+++ b/_implementation-notes/evening-series/FotH Evening Session 21 Slides DRAFT v1.pptx
@@ -4927,7 +4927,7 @@
                 </a:solidFill>
                 <a:latin typeface="Calibri"/>
               </a:rPr>
-              <a:t>The Going Deeper bridge — twelve Wednesdays. Decide on your own time. Tonight is not a recruiting pitch.</a:t>
+              <a:t>The Going Deeper bridge — twelve sessions. Decide on your own time. Tonight is not a recruiting pitch.</a:t>
             </a:r>
           </a:p>
           <a:p>
@@ -6721,7 +6721,7 @@
                 </a:solidFill>
                 <a:latin typeface="Calibri"/>
               </a:rPr>
-              <a:t>Fourteen Wednesdays — the soil of the heart, our stories, confession and restoration, hearing God in scripture, the gardens of our hearts, the quiet doubts, what was prepared for us</a:t>
+              <a:t>Fifteen evenings — the soil of the heart, our stories, confession and restoration, hearing God in scripture, the gardens of our hearts, the quiet doubts, what was prepared for us</a:t>
             </a:r>
           </a:p>
           <a:p>
